--- a/report/CC_Project_PPT_Group23.pptx
+++ b/report/CC_Project_PPT_Group23.pptx
@@ -585,7 +585,7 @@
           <a:lstStyle/>
           <a:p>
             <a:r>
-              <a:t>Keep video under 8 minutes; speak over each step.</a:t>
+              <a:t>Each member speaks for ~ 60 s on their slice; equal participation is mandated by rubric.</a:t>
             </a:r>
           </a:p>
         </p:txBody>
@@ -655,147 +655,7 @@
           <a:lstStyle/>
           <a:p>
             <a:r>
-              <a:t>Each member speaks for ~ 60 s on their slice; equal participation is mandated by rubric.</a:t>
-            </a:r>
-          </a:p>
-        </p:txBody>
-      </p:sp>
-      <p:sp>
-        <p:nvSpPr>
-          <p:cNvPr id="4" name="Slide Number Placeholder 3"/>
-          <p:cNvSpPr>
-            <a:spLocks noGrp="1"/>
-          </p:cNvSpPr>
-          <p:nvPr>
-            <p:ph type="sldNum" idx="5" sz="quarter"/>
-          </p:nvPr>
-        </p:nvSpPr>
-        <p:spPr/>
-      </p:sp>
-    </p:spTree>
-  </p:cSld>
-  <p:clrMapOvr>
-    <a:masterClrMapping/>
-  </p:clrMapOvr>
-</p:notes>
-</file>
-
-<file path=ppt/notesSlides/notesSlide12.xml><?xml version="1.0" encoding="utf-8"?>
-<p:notes xmlns:a="http://schemas.openxmlformats.org/drawingml/2006/main" xmlns:p="http://schemas.openxmlformats.org/presentationml/2006/main" xmlns:r="http://schemas.openxmlformats.org/officeDocument/2006/relationships">
-  <p:cSld>
-    <p:spTree>
-      <p:nvGrpSpPr>
-        <p:cNvPr id="1" name=""/>
-        <p:cNvGrpSpPr/>
-        <p:nvPr/>
-      </p:nvGrpSpPr>
-      <p:grpSpPr>
-        <a:xfrm>
-          <a:off x="0" y="0"/>
-          <a:ext cx="0" cy="0"/>
-          <a:chOff x="0" y="0"/>
-          <a:chExt cx="0" cy="0"/>
-        </a:xfrm>
-      </p:grpSpPr>
-      <p:sp>
-        <p:nvSpPr>
-          <p:cNvPr id="2" name="Slide Image Placeholder 1"/>
-          <p:cNvSpPr>
-            <a:spLocks noGrp="1"/>
-          </p:cNvSpPr>
-          <p:nvPr>
-            <p:ph type="sldImg" idx="2"/>
-          </p:nvPr>
-        </p:nvSpPr>
-        <p:spPr/>
-      </p:sp>
-      <p:sp>
-        <p:nvSpPr>
-          <p:cNvPr id="3" name="Notes Placeholder 2"/>
-          <p:cNvSpPr>
-            <a:spLocks noGrp="1"/>
-          </p:cNvSpPr>
-          <p:nvPr>
-            <p:ph type="body" idx="3" sz="quarter"/>
-          </p:nvPr>
-        </p:nvSpPr>
-        <p:spPr/>
-        <p:txBody>
-          <a:bodyPr/>
-          <a:lstStyle/>
-          <a:p>
-            <a:r>
               <a:t>Pull verbatim from `report/Phase2_Report.md` §7.</a:t>
-            </a:r>
-          </a:p>
-        </p:txBody>
-      </p:sp>
-      <p:sp>
-        <p:nvSpPr>
-          <p:cNvPr id="4" name="Slide Number Placeholder 3"/>
-          <p:cNvSpPr>
-            <a:spLocks noGrp="1"/>
-          </p:cNvSpPr>
-          <p:nvPr>
-            <p:ph type="sldNum" idx="5" sz="quarter"/>
-          </p:nvPr>
-        </p:nvSpPr>
-        <p:spPr/>
-      </p:sp>
-    </p:spTree>
-  </p:cSld>
-  <p:clrMapOvr>
-    <a:masterClrMapping/>
-  </p:clrMapOvr>
-</p:notes>
-</file>
-
-<file path=ppt/notesSlides/notesSlide13.xml><?xml version="1.0" encoding="utf-8"?>
-<p:notes xmlns:a="http://schemas.openxmlformats.org/drawingml/2006/main" xmlns:p="http://schemas.openxmlformats.org/presentationml/2006/main" xmlns:r="http://schemas.openxmlformats.org/officeDocument/2006/relationships">
-  <p:cSld>
-    <p:spTree>
-      <p:nvGrpSpPr>
-        <p:cNvPr id="1" name=""/>
-        <p:cNvGrpSpPr/>
-        <p:nvPr/>
-      </p:nvGrpSpPr>
-      <p:grpSpPr>
-        <a:xfrm>
-          <a:off x="0" y="0"/>
-          <a:ext cx="0" cy="0"/>
-          <a:chOff x="0" y="0"/>
-          <a:chExt cx="0" cy="0"/>
-        </a:xfrm>
-      </p:grpSpPr>
-      <p:sp>
-        <p:nvSpPr>
-          <p:cNvPr id="2" name="Slide Image Placeholder 1"/>
-          <p:cNvSpPr>
-            <a:spLocks noGrp="1"/>
-          </p:cNvSpPr>
-          <p:nvPr>
-            <p:ph type="sldImg" idx="2"/>
-          </p:nvPr>
-        </p:nvSpPr>
-        <p:spPr/>
-      </p:sp>
-      <p:sp>
-        <p:nvSpPr>
-          <p:cNvPr id="3" name="Notes Placeholder 2"/>
-          <p:cNvSpPr>
-            <a:spLocks noGrp="1"/>
-          </p:cNvSpPr>
-          <p:nvPr>
-            <p:ph type="body" idx="3" sz="quarter"/>
-          </p:nvPr>
-        </p:nvSpPr>
-        <p:spPr/>
-        <p:txBody>
-          <a:bodyPr/>
-          <a:lstStyle/>
-          <a:p>
-            <a:r>
-              <a:t>Be ready for: "Why not DynamoDB?", "How does Multi-AZ failover work?", "How would you achieve 99.99% (4-nines) instead of 99.9?", "What about WAF?"</a:t>
             </a:r>
           </a:p>
         </p:txBody>
@@ -4363,61 +4223,331 @@
       <p:grpSpPr/>
       <p:sp>
         <p:nvSpPr>
-          <p:cNvPr id="2" name="Title 1"/>
-          <p:cNvSpPr>
-            <a:spLocks noGrp="1"/>
-          </p:cNvSpPr>
-          <p:nvPr>
-            <p:ph type="ctrTitle"/>
-          </p:nvPr>
-        </p:nvSpPr>
-        <p:spPr/>
-        <p:txBody>
-          <a:bodyPr/>
-          <a:lstStyle/>
-          <a:p>
-            <a:r>
-              <a:rPr b="1">
-                <a:solidFill>
-                  <a:srgbClr val="0B3D91"/>
-                </a:solidFill>
-              </a:rPr>
-              <a:t>Title</a:t>
-            </a:r>
-          </a:p>
-        </p:txBody>
-      </p:sp>
-      <p:sp>
-        <p:nvSpPr>
-          <p:cNvPr id="3" name="Subtitle 2"/>
-          <p:cNvSpPr>
-            <a:spLocks noGrp="1"/>
-          </p:cNvSpPr>
-          <p:nvPr>
-            <p:ph type="subTitle" idx="1"/>
-          </p:nvPr>
-        </p:nvSpPr>
-        <p:spPr/>
-        <p:txBody>
-          <a:bodyPr/>
-          <a:lstStyle/>
-          <a:p>
-            <a:r>
+          <p:cNvPr id="2" name="Rectangle 1"/>
+          <p:cNvSpPr/>
+          <p:nvPr/>
+        </p:nvSpPr>
+        <p:spPr>
+          <a:xfrm>
+            <a:off x="0" y="0"/>
+            <a:ext cx="12191695" cy="4023360"/>
+          </a:xfrm>
+          <a:prstGeom prst="rect">
+            <a:avLst/>
+          </a:prstGeom>
+          <a:solidFill>
+            <a:srgbClr val="0B2E6F"/>
+          </a:solidFill>
+          <a:ln>
+            <a:noFill/>
+          </a:ln>
+          <a:effectLst/>
+        </p:spPr>
+        <p:style>
+          <a:lnRef idx="1">
+            <a:schemeClr val="accent1"/>
+          </a:lnRef>
+          <a:fillRef idx="3">
+            <a:schemeClr val="accent1"/>
+          </a:fillRef>
+          <a:effectRef idx="2">
+            <a:schemeClr val="accent1"/>
+          </a:effectRef>
+          <a:fontRef idx="minor">
+            <a:schemeClr val="lt1"/>
+          </a:fontRef>
+        </p:style>
+        <p:txBody>
+          <a:bodyPr rtlCol="0" anchor="ctr"/>
+          <a:lstStyle/>
+          <a:p>
+            <a:pPr algn="ctr"/>
+          </a:p>
+        </p:txBody>
+      </p:sp>
+      <p:sp>
+        <p:nvSpPr>
+          <p:cNvPr id="3" name="Rectangle 2"/>
+          <p:cNvSpPr/>
+          <p:nvPr/>
+        </p:nvSpPr>
+        <p:spPr>
+          <a:xfrm>
+            <a:off x="0" y="3977639"/>
+            <a:ext cx="12191695" cy="109728"/>
+          </a:xfrm>
+          <a:prstGeom prst="rect">
+            <a:avLst/>
+          </a:prstGeom>
+          <a:solidFill>
+            <a:srgbClr val="109BC4"/>
+          </a:solidFill>
+          <a:ln>
+            <a:noFill/>
+          </a:ln>
+        </p:spPr>
+        <p:style>
+          <a:lnRef idx="1">
+            <a:schemeClr val="accent1"/>
+          </a:lnRef>
+          <a:fillRef idx="3">
+            <a:schemeClr val="accent1"/>
+          </a:fillRef>
+          <a:effectRef idx="2">
+            <a:schemeClr val="accent1"/>
+          </a:effectRef>
+          <a:fontRef idx="minor">
+            <a:schemeClr val="lt1"/>
+          </a:fontRef>
+        </p:style>
+        <p:txBody>
+          <a:bodyPr rtlCol="0" anchor="ctr"/>
+          <a:lstStyle/>
+          <a:p>
+            <a:pPr algn="ctr"/>
+          </a:p>
+        </p:txBody>
+      </p:sp>
+      <p:sp>
+        <p:nvSpPr>
+          <p:cNvPr id="4" name="TextBox 3"/>
+          <p:cNvSpPr txBox="1"/>
+          <p:nvPr/>
+        </p:nvSpPr>
+        <p:spPr>
+          <a:xfrm>
+            <a:off x="502920" y="1051560"/>
+            <a:ext cx="11185855" cy="1097280"/>
+          </a:xfrm>
+          <a:prstGeom prst="rect">
+            <a:avLst/>
+          </a:prstGeom>
+          <a:noFill/>
+        </p:spPr>
+        <p:txBody>
+          <a:bodyPr wrap="square" lIns="0" rIns="0" tIns="0" bIns="0" anchor="t">
+            <a:spAutoFit/>
+          </a:bodyPr>
+          <a:lstStyle/>
+          <a:p>
+            <a:pPr algn="l"/>
+            <a:r>
+              <a:rPr sz="4400" b="1">
+                <a:solidFill>
+                  <a:srgbClr val="FFFFFF"/>
+                </a:solidFill>
+                <a:latin typeface="Calibri"/>
+              </a:rPr>
+              <a:t>Cloud-Native Healthcare DMS</a:t>
+            </a:r>
+          </a:p>
+        </p:txBody>
+      </p:sp>
+      <p:sp>
+        <p:nvSpPr>
+          <p:cNvPr id="5" name="TextBox 4"/>
+          <p:cNvSpPr txBox="1"/>
+          <p:nvPr/>
+        </p:nvSpPr>
+        <p:spPr>
+          <a:xfrm>
+            <a:off x="502920" y="1965960"/>
+            <a:ext cx="11185855" cy="640080"/>
+          </a:xfrm>
+          <a:prstGeom prst="rect">
+            <a:avLst/>
+          </a:prstGeom>
+          <a:noFill/>
+        </p:spPr>
+        <p:txBody>
+          <a:bodyPr wrap="square" lIns="0" rIns="0" tIns="0" bIns="0" anchor="t">
+            <a:spAutoFit/>
+          </a:bodyPr>
+          <a:lstStyle/>
+          <a:p>
+            <a:pPr algn="l"/>
+            <a:r>
+              <a:rPr sz="2400" b="0">
+                <a:solidFill>
+                  <a:srgbClr val="FFFFFF"/>
+                </a:solidFill>
+                <a:latin typeface="Calibri"/>
+              </a:rPr>
               <a:t>Phase 2 — Implementation &amp; Demonstration</a:t>
             </a:r>
           </a:p>
-          <a:p>
-            <a:r>
+        </p:txBody>
+      </p:sp>
+      <p:sp>
+        <p:nvSpPr>
+          <p:cNvPr id="6" name="TextBox 5"/>
+          <p:cNvSpPr txBox="1"/>
+          <p:nvPr/>
+        </p:nvSpPr>
+        <p:spPr>
+          <a:xfrm>
+            <a:off x="502920" y="2697480"/>
+            <a:ext cx="11185855" cy="548640"/>
+          </a:xfrm>
+          <a:prstGeom prst="rect">
+            <a:avLst/>
+          </a:prstGeom>
+          <a:noFill/>
+        </p:spPr>
+        <p:txBody>
+          <a:bodyPr wrap="square" lIns="0" rIns="0" tIns="0" bIns="0" anchor="t">
+            <a:spAutoFit/>
+          </a:bodyPr>
+          <a:lstStyle/>
+          <a:p>
+            <a:pPr algn="l"/>
+            <a:r>
+              <a:rPr sz="1600" b="0">
+                <a:solidFill>
+                  <a:srgbClr val="FFFFFF"/>
+                </a:solidFill>
+                <a:latin typeface="Calibri"/>
+              </a:rPr>
+              <a:t>BITS Pilani  ·  Cloud Computing (CSIZG527)  ·  Group 23</a:t>
+            </a:r>
+          </a:p>
+        </p:txBody>
+      </p:sp>
+      <p:sp>
+        <p:nvSpPr>
+          <p:cNvPr id="7" name="TextBox 6"/>
+          <p:cNvSpPr txBox="1"/>
+          <p:nvPr/>
+        </p:nvSpPr>
+        <p:spPr>
+          <a:xfrm>
+            <a:off x="502920" y="4434840"/>
+            <a:ext cx="11185855" cy="411480"/>
+          </a:xfrm>
+          <a:prstGeom prst="rect">
+            <a:avLst/>
+          </a:prstGeom>
+          <a:noFill/>
+        </p:spPr>
+        <p:txBody>
+          <a:bodyPr wrap="square" lIns="0" rIns="0" tIns="0" bIns="0" anchor="t">
+            <a:spAutoFit/>
+          </a:bodyPr>
+          <a:lstStyle/>
+          <a:p>
+            <a:pPr algn="l"/>
+            <a:r>
+              <a:rPr sz="1800" b="0">
+                <a:solidFill>
+                  <a:srgbClr val="1A1A1A"/>
+                </a:solidFill>
+                <a:latin typeface="Calibri"/>
+              </a:rPr>
+              <a:t>Phase 2 — Implementation &amp; Demonstration</a:t>
+            </a:r>
+          </a:p>
+        </p:txBody>
+      </p:sp>
+      <p:sp>
+        <p:nvSpPr>
+          <p:cNvPr id="8" name="TextBox 7"/>
+          <p:cNvSpPr txBox="1"/>
+          <p:nvPr/>
+        </p:nvSpPr>
+        <p:spPr>
+          <a:xfrm>
+            <a:off x="502920" y="4846320"/>
+            <a:ext cx="11185855" cy="411480"/>
+          </a:xfrm>
+          <a:prstGeom prst="rect">
+            <a:avLst/>
+          </a:prstGeom>
+          <a:noFill/>
+        </p:spPr>
+        <p:txBody>
+          <a:bodyPr wrap="square" lIns="0" rIns="0" tIns="0" bIns="0" anchor="t">
+            <a:spAutoFit/>
+          </a:bodyPr>
+          <a:lstStyle/>
+          <a:p>
+            <a:pPr algn="l"/>
+            <a:r>
+              <a:rPr sz="1800" b="0">
+                <a:solidFill>
+                  <a:srgbClr val="1A1A1A"/>
+                </a:solidFill>
+                <a:latin typeface="Calibri"/>
+              </a:rPr>
               <a:t>BITS Pilani · Cloud Computing (CSIZG527) · Group 23</a:t>
             </a:r>
           </a:p>
-          <a:p>
-            <a:r>
+        </p:txBody>
+      </p:sp>
+      <p:sp>
+        <p:nvSpPr>
+          <p:cNvPr id="9" name="TextBox 8"/>
+          <p:cNvSpPr txBox="1"/>
+          <p:nvPr/>
+        </p:nvSpPr>
+        <p:spPr>
+          <a:xfrm>
+            <a:off x="502920" y="5257800"/>
+            <a:ext cx="11185855" cy="411480"/>
+          </a:xfrm>
+          <a:prstGeom prst="rect">
+            <a:avLst/>
+          </a:prstGeom>
+          <a:noFill/>
+        </p:spPr>
+        <p:txBody>
+          <a:bodyPr wrap="square" lIns="0" rIns="0" tIns="0" bIns="0" anchor="t">
+            <a:spAutoFit/>
+          </a:bodyPr>
+          <a:lstStyle/>
+          <a:p>
+            <a:pPr algn="l"/>
+            <a:r>
+              <a:rPr sz="1800" b="0">
+                <a:solidFill>
+                  <a:srgbClr val="1A1A1A"/>
+                </a:solidFill>
+                <a:latin typeface="Calibri"/>
+              </a:rPr>
               <a:t>Karan Rawat · Vikas Kumar · Kriti Tripathi · Avanish Pratap Singh</a:t>
             </a:r>
           </a:p>
-          <a:p>
-            <a:r>
+        </p:txBody>
+      </p:sp>
+      <p:sp>
+        <p:nvSpPr>
+          <p:cNvPr id="10" name="TextBox 9"/>
+          <p:cNvSpPr txBox="1"/>
+          <p:nvPr/>
+        </p:nvSpPr>
+        <p:spPr>
+          <a:xfrm>
+            <a:off x="502920" y="5669280"/>
+            <a:ext cx="11185855" cy="411480"/>
+          </a:xfrm>
+          <a:prstGeom prst="rect">
+            <a:avLst/>
+          </a:prstGeom>
+          <a:noFill/>
+        </p:spPr>
+        <p:txBody>
+          <a:bodyPr wrap="square" lIns="0" rIns="0" tIns="0" bIns="0" anchor="t">
+            <a:spAutoFit/>
+          </a:bodyPr>
+          <a:lstStyle/>
+          <a:p>
+            <a:pPr algn="l"/>
+            <a:r>
+              <a:rPr sz="1800" b="0">
+                <a:solidFill>
+                  <a:srgbClr val="1A1A1A"/>
+                </a:solidFill>
+                <a:latin typeface="Calibri"/>
+              </a:rPr>
               <a:t>Instructor: Prof. Shwetha Vittal · 02 May 2026</a:t>
             </a:r>
           </a:p>
@@ -4443,24 +4573,77 @@
       <p:grpSpPr/>
       <p:sp>
         <p:nvSpPr>
-          <p:cNvPr id="2" name="Title 1"/>
-          <p:cNvSpPr>
-            <a:spLocks noGrp="1"/>
-          </p:cNvSpPr>
-          <p:nvPr>
-            <p:ph type="title"/>
-          </p:nvPr>
-        </p:nvSpPr>
-        <p:spPr/>
-        <p:txBody>
-          <a:bodyPr/>
-          <a:lstStyle/>
-          <a:p>
-            <a:r>
-              <a:rPr b="1">
-                <a:solidFill>
-                  <a:srgbClr val="0B3D91"/>
-                </a:solidFill>
+          <p:cNvPr id="2" name="Rectangle 1"/>
+          <p:cNvSpPr/>
+          <p:nvPr/>
+        </p:nvSpPr>
+        <p:spPr>
+          <a:xfrm>
+            <a:off x="502920" y="365760"/>
+            <a:ext cx="164592" cy="777240"/>
+          </a:xfrm>
+          <a:prstGeom prst="rect">
+            <a:avLst/>
+          </a:prstGeom>
+          <a:solidFill>
+            <a:srgbClr val="109BC4"/>
+          </a:solidFill>
+          <a:ln>
+            <a:noFill/>
+          </a:ln>
+          <a:effectLst/>
+        </p:spPr>
+        <p:style>
+          <a:lnRef idx="1">
+            <a:schemeClr val="accent1"/>
+          </a:lnRef>
+          <a:fillRef idx="3">
+            <a:schemeClr val="accent1"/>
+          </a:fillRef>
+          <a:effectRef idx="2">
+            <a:schemeClr val="accent1"/>
+          </a:effectRef>
+          <a:fontRef idx="minor">
+            <a:schemeClr val="lt1"/>
+          </a:fontRef>
+        </p:style>
+        <p:txBody>
+          <a:bodyPr rtlCol="0" anchor="ctr"/>
+          <a:lstStyle/>
+          <a:p>
+            <a:pPr algn="ctr"/>
+          </a:p>
+        </p:txBody>
+      </p:sp>
+      <p:sp>
+        <p:nvSpPr>
+          <p:cNvPr id="3" name="TextBox 2"/>
+          <p:cNvSpPr txBox="1"/>
+          <p:nvPr/>
+        </p:nvSpPr>
+        <p:spPr>
+          <a:xfrm>
+            <a:off x="868680" y="365760"/>
+            <a:ext cx="10820095" cy="777240"/>
+          </a:xfrm>
+          <a:prstGeom prst="rect">
+            <a:avLst/>
+          </a:prstGeom>
+          <a:noFill/>
+        </p:spPr>
+        <p:txBody>
+          <a:bodyPr wrap="square" anchor="ctr">
+            <a:spAutoFit/>
+          </a:bodyPr>
+          <a:lstStyle/>
+          <a:p>
+            <a:pPr algn="l"/>
+            <a:r>
+              <a:rPr sz="2800" b="1">
+                <a:solidFill>
+                  <a:srgbClr val="0B2E6F"/>
+                </a:solidFill>
+                <a:latin typeface="Calibri"/>
               </a:rPr>
               <a:t>Test Strategy</a:t>
             </a:r>
@@ -4469,71 +4652,262 @@
       </p:sp>
       <p:sp>
         <p:nvSpPr>
-          <p:cNvPr id="3" name="Content Placeholder 2"/>
-          <p:cNvSpPr>
-            <a:spLocks noGrp="1"/>
-          </p:cNvSpPr>
-          <p:nvPr>
-            <p:ph idx="1"/>
-          </p:nvPr>
-        </p:nvSpPr>
-        <p:spPr/>
-        <p:txBody>
-          <a:bodyPr wrap="square"/>
-          <a:lstStyle/>
-          <a:p>
-            <a:pPr lvl="1"/>
-            <a:r>
-              <a:rPr sz="1400">
-                <a:solidFill>
-                  <a:srgbClr val="222222"/>
-                </a:solidFill>
+          <p:cNvPr id="4" name="Rectangle 3"/>
+          <p:cNvSpPr/>
+          <p:nvPr/>
+        </p:nvSpPr>
+        <p:spPr>
+          <a:xfrm>
+            <a:off x="868680" y="1188720"/>
+            <a:ext cx="1097280" cy="38100"/>
+          </a:xfrm>
+          <a:prstGeom prst="rect">
+            <a:avLst/>
+          </a:prstGeom>
+          <a:solidFill>
+            <a:srgbClr val="109BC4"/>
+          </a:solidFill>
+          <a:ln>
+            <a:noFill/>
+          </a:ln>
+          <a:effectLst/>
+        </p:spPr>
+        <p:style>
+          <a:lnRef idx="1">
+            <a:schemeClr val="accent1"/>
+          </a:lnRef>
+          <a:fillRef idx="3">
+            <a:schemeClr val="accent1"/>
+          </a:fillRef>
+          <a:effectRef idx="2">
+            <a:schemeClr val="accent1"/>
+          </a:effectRef>
+          <a:fontRef idx="minor">
+            <a:schemeClr val="lt1"/>
+          </a:fontRef>
+        </p:style>
+        <p:txBody>
+          <a:bodyPr rtlCol="0" anchor="ctr"/>
+          <a:lstStyle/>
+          <a:p>
+            <a:pPr algn="ctr"/>
+          </a:p>
+        </p:txBody>
+      </p:sp>
+      <p:sp>
+        <p:nvSpPr>
+          <p:cNvPr id="5" name="TextBox 4"/>
+          <p:cNvSpPr txBox="1"/>
+          <p:nvPr/>
+        </p:nvSpPr>
+        <p:spPr>
+          <a:xfrm>
+            <a:off x="502920" y="1417320"/>
+            <a:ext cx="11185855" cy="2468880"/>
+          </a:xfrm>
+          <a:prstGeom prst="rect">
+            <a:avLst/>
+          </a:prstGeom>
+          <a:noFill/>
+        </p:spPr>
+        <p:txBody>
+          <a:bodyPr wrap="square" lIns="0" tIns="0">
+            <a:spAutoFit/>
+          </a:bodyPr>
+          <a:lstStyle/>
+          <a:p>
+            <a:pPr algn="l">
+              <a:spcAft>
+                <a:spcPts val="400"/>
+              </a:spcAft>
+            </a:pPr>
+            <a:r>
+              <a:rPr sz="1800" b="1">
+                <a:solidFill>
+                  <a:srgbClr val="109BC4"/>
+                </a:solidFill>
+                <a:latin typeface="Calibri"/>
+              </a:rPr>
+              <a:t>▸  </a:t>
+            </a:r>
+            <a:r>
+              <a:rPr sz="1700">
+                <a:solidFill>
+                  <a:srgbClr val="1A1A1A"/>
+                </a:solidFill>
+                <a:latin typeface="Calibri"/>
               </a:rPr>
               <a:t>29 pytest tests, all green, run in 28 s on a laptop</a:t>
             </a:r>
           </a:p>
           <a:p>
-            <a:pPr lvl="1"/>
-            <a:r>
-              <a:rPr sz="1400">
-                <a:solidFill>
-                  <a:srgbClr val="222222"/>
-                </a:solidFill>
+            <a:pPr algn="l">
+              <a:spcAft>
+                <a:spcPts val="400"/>
+              </a:spcAft>
+            </a:pPr>
+            <a:r>
+              <a:rPr sz="1800" b="1">
+                <a:solidFill>
+                  <a:srgbClr val="109BC4"/>
+                </a:solidFill>
+                <a:latin typeface="Calibri"/>
+              </a:rPr>
+              <a:t>▸  </a:t>
+            </a:r>
+            <a:r>
+              <a:rPr sz="1700">
+                <a:solidFill>
+                  <a:srgbClr val="1A1A1A"/>
+                </a:solidFill>
+                <a:latin typeface="Calibri"/>
               </a:rPr>
               <a:t>moto mocks S3 + SNS → no AWS credentials required for CI</a:t>
             </a:r>
           </a:p>
           <a:p>
-            <a:pPr lvl="1"/>
-            <a:r>
-              <a:rPr sz="1400">
-                <a:solidFill>
-                  <a:srgbClr val="222222"/>
-                </a:solidFill>
+            <a:pPr algn="l">
+              <a:spcAft>
+                <a:spcPts val="400"/>
+              </a:spcAft>
+            </a:pPr>
+            <a:r>
+              <a:rPr sz="1800" b="1">
+                <a:solidFill>
+                  <a:srgbClr val="109BC4"/>
+                </a:solidFill>
+                <a:latin typeface="Calibri"/>
+              </a:rPr>
+              <a:t>▸  </a:t>
+            </a:r>
+            <a:r>
+              <a:rPr sz="1700">
+                <a:solidFill>
+                  <a:srgbClr val="1A1A1A"/>
+                </a:solidFill>
+                <a:latin typeface="Calibri"/>
               </a:rPr>
               <a:t>Coverage spans business logic AND cloud abstractions:</a:t>
             </a:r>
           </a:p>
           <a:p>
-            <a:pPr lvl="1"/>
-            <a:r>
-              <a:rPr sz="1400">
-                <a:solidFill>
-                  <a:srgbClr val="222222"/>
-                </a:solidFill>
+            <a:pPr algn="l">
+              <a:spcAft>
+                <a:spcPts val="400"/>
+              </a:spcAft>
+            </a:pPr>
+            <a:r>
+              <a:rPr sz="1800" b="1">
+                <a:solidFill>
+                  <a:srgbClr val="109BC4"/>
+                </a:solidFill>
+                <a:latin typeface="Calibri"/>
+              </a:rPr>
+              <a:t>▸  </a:t>
+            </a:r>
+            <a:r>
+              <a:rPr sz="1700">
+                <a:solidFill>
+                  <a:srgbClr val="1A1A1A"/>
+                </a:solidFill>
+                <a:latin typeface="Calibri"/>
               </a:rPr>
               <a:t>6 auth · 7 patients · 4 appointments</a:t>
             </a:r>
           </a:p>
           <a:p>
-            <a:pPr lvl="1"/>
-            <a:r>
-              <a:rPr sz="1400">
-                <a:solidFill>
-                  <a:srgbClr val="222222"/>
-                </a:solidFill>
+            <a:pPr algn="l">
+              <a:spcAft>
+                <a:spcPts val="400"/>
+              </a:spcAft>
+            </a:pPr>
+            <a:r>
+              <a:rPr sz="1800" b="1">
+                <a:solidFill>
+                  <a:srgbClr val="109BC4"/>
+                </a:solidFill>
+                <a:latin typeface="Calibri"/>
+              </a:rPr>
+              <a:t>▸  </a:t>
+            </a:r>
+            <a:r>
+              <a:rPr sz="1700">
+                <a:solidFill>
+                  <a:srgbClr val="1A1A1A"/>
+                </a:solidFill>
+                <a:latin typeface="Calibri"/>
               </a:rPr>
               <a:t>4 storage · 3 Lambda · 3 logging · 2 upload E2E</a:t>
+            </a:r>
+          </a:p>
+        </p:txBody>
+      </p:sp>
+      <p:sp>
+        <p:nvSpPr>
+          <p:cNvPr id="6" name="TextBox 5"/>
+          <p:cNvSpPr txBox="1"/>
+          <p:nvPr/>
+        </p:nvSpPr>
+        <p:spPr>
+          <a:xfrm>
+            <a:off x="502920" y="6446520"/>
+            <a:ext cx="7315200" cy="274320"/>
+          </a:xfrm>
+          <a:prstGeom prst="rect">
+            <a:avLst/>
+          </a:prstGeom>
+          <a:noFill/>
+        </p:spPr>
+        <p:txBody>
+          <a:bodyPr wrap="square" lIns="0" rIns="0" tIns="0" bIns="0" anchor="t">
+            <a:spAutoFit/>
+          </a:bodyPr>
+          <a:lstStyle/>
+          <a:p>
+            <a:pPr algn="l"/>
+            <a:r>
+              <a:rPr sz="900" b="0">
+                <a:solidFill>
+                  <a:srgbClr val="555F6D"/>
+                </a:solidFill>
+                <a:latin typeface="Calibri"/>
+              </a:rPr>
+              <a:t>Cloud-Native Healthcare DMS  ·  BITS Pilani  ·  Group 23</a:t>
+            </a:r>
+          </a:p>
+        </p:txBody>
+      </p:sp>
+      <p:sp>
+        <p:nvSpPr>
+          <p:cNvPr id="7" name="TextBox 6"/>
+          <p:cNvSpPr txBox="1"/>
+          <p:nvPr/>
+        </p:nvSpPr>
+        <p:spPr>
+          <a:xfrm>
+            <a:off x="10515600" y="6446520"/>
+            <a:ext cx="1188720" cy="274320"/>
+          </a:xfrm>
+          <a:prstGeom prst="rect">
+            <a:avLst/>
+          </a:prstGeom>
+          <a:noFill/>
+        </p:spPr>
+        <p:txBody>
+          <a:bodyPr wrap="square" lIns="0" rIns="0" tIns="0" bIns="0" anchor="t">
+            <a:spAutoFit/>
+          </a:bodyPr>
+          <a:lstStyle/>
+          <a:p>
+            <a:pPr algn="r"/>
+            <a:r>
+              <a:rPr sz="900" b="0">
+                <a:solidFill>
+                  <a:srgbClr val="555F6D"/>
+                </a:solidFill>
+                <a:latin typeface="Calibri"/>
+              </a:rPr>
+              <a:t>10 / 14</a:t>
             </a:r>
           </a:p>
         </p:txBody>
@@ -4558,24 +4932,156 @@
       <p:grpSpPr/>
       <p:sp>
         <p:nvSpPr>
-          <p:cNvPr id="2" name="Title 1"/>
-          <p:cNvSpPr>
-            <a:spLocks noGrp="1"/>
-          </p:cNvSpPr>
-          <p:nvPr>
-            <p:ph type="title"/>
-          </p:nvPr>
-        </p:nvSpPr>
-        <p:spPr/>
-        <p:txBody>
-          <a:bodyPr/>
-          <a:lstStyle/>
-          <a:p>
-            <a:r>
-              <a:rPr b="1">
-                <a:solidFill>
-                  <a:srgbClr val="0B3D91"/>
-                </a:solidFill>
+          <p:cNvPr id="2" name="Rectangle 1"/>
+          <p:cNvSpPr/>
+          <p:nvPr/>
+        </p:nvSpPr>
+        <p:spPr>
+          <a:xfrm>
+            <a:off x="0" y="0"/>
+            <a:ext cx="12191695" cy="6858000"/>
+          </a:xfrm>
+          <a:prstGeom prst="rect">
+            <a:avLst/>
+          </a:prstGeom>
+          <a:solidFill>
+            <a:srgbClr val="0B2E6F"/>
+          </a:solidFill>
+          <a:ln>
+            <a:noFill/>
+          </a:ln>
+          <a:effectLst/>
+        </p:spPr>
+        <p:style>
+          <a:lnRef idx="1">
+            <a:schemeClr val="accent1"/>
+          </a:lnRef>
+          <a:fillRef idx="3">
+            <a:schemeClr val="accent1"/>
+          </a:fillRef>
+          <a:effectRef idx="2">
+            <a:schemeClr val="accent1"/>
+          </a:effectRef>
+          <a:fontRef idx="minor">
+            <a:schemeClr val="lt1"/>
+          </a:fontRef>
+        </p:style>
+        <p:txBody>
+          <a:bodyPr rtlCol="0" anchor="ctr"/>
+          <a:lstStyle/>
+          <a:p>
+            <a:pPr algn="ctr"/>
+          </a:p>
+        </p:txBody>
+      </p:sp>
+      <p:sp>
+        <p:nvSpPr>
+          <p:cNvPr id="3" name="Rectangle 2"/>
+          <p:cNvSpPr/>
+          <p:nvPr/>
+        </p:nvSpPr>
+        <p:spPr>
+          <a:xfrm>
+            <a:off x="0" y="3200400"/>
+            <a:ext cx="12191695" cy="38100"/>
+          </a:xfrm>
+          <a:prstGeom prst="rect">
+            <a:avLst/>
+          </a:prstGeom>
+          <a:solidFill>
+            <a:srgbClr val="109BC4"/>
+          </a:solidFill>
+          <a:ln>
+            <a:noFill/>
+          </a:ln>
+          <a:effectLst/>
+        </p:spPr>
+        <p:style>
+          <a:lnRef idx="1">
+            <a:schemeClr val="accent1"/>
+          </a:lnRef>
+          <a:fillRef idx="3">
+            <a:schemeClr val="accent1"/>
+          </a:fillRef>
+          <a:effectRef idx="2">
+            <a:schemeClr val="accent1"/>
+          </a:effectRef>
+          <a:fontRef idx="minor">
+            <a:schemeClr val="lt1"/>
+          </a:fontRef>
+        </p:style>
+        <p:txBody>
+          <a:bodyPr rtlCol="0" anchor="ctr"/>
+          <a:lstStyle/>
+          <a:p>
+            <a:pPr algn="ctr"/>
+          </a:p>
+        </p:txBody>
+      </p:sp>
+      <p:sp>
+        <p:nvSpPr>
+          <p:cNvPr id="4" name="TextBox 3"/>
+          <p:cNvSpPr txBox="1"/>
+          <p:nvPr/>
+        </p:nvSpPr>
+        <p:spPr>
+          <a:xfrm>
+            <a:off x="502920" y="2468880"/>
+            <a:ext cx="11185855" cy="548640"/>
+          </a:xfrm>
+          <a:prstGeom prst="rect">
+            <a:avLst/>
+          </a:prstGeom>
+          <a:noFill/>
+        </p:spPr>
+        <p:txBody>
+          <a:bodyPr wrap="square" lIns="0" rIns="0" tIns="0" bIns="0" anchor="t">
+            <a:spAutoFit/>
+          </a:bodyPr>
+          <a:lstStyle/>
+          <a:p>
+            <a:pPr algn="l"/>
+            <a:r>
+              <a:rPr sz="1800" b="1">
+                <a:solidFill>
+                  <a:srgbClr val="109BC4"/>
+                </a:solidFill>
+                <a:latin typeface="Calibri"/>
+              </a:rPr>
+              <a:t>Section</a:t>
+            </a:r>
+          </a:p>
+        </p:txBody>
+      </p:sp>
+      <p:sp>
+        <p:nvSpPr>
+          <p:cNvPr id="5" name="TextBox 4"/>
+          <p:cNvSpPr txBox="1"/>
+          <p:nvPr/>
+        </p:nvSpPr>
+        <p:spPr>
+          <a:xfrm>
+            <a:off x="502920" y="3383280"/>
+            <a:ext cx="11185855" cy="1371600"/>
+          </a:xfrm>
+          <a:prstGeom prst="rect">
+            <a:avLst/>
+          </a:prstGeom>
+          <a:noFill/>
+        </p:spPr>
+        <p:txBody>
+          <a:bodyPr wrap="square" lIns="0" rIns="0" tIns="0" bIns="0" anchor="t">
+            <a:spAutoFit/>
+          </a:bodyPr>
+          <a:lstStyle/>
+          <a:p>
+            <a:pPr algn="l"/>
+            <a:r>
+              <a:rPr sz="4400" b="1">
+                <a:solidFill>
+                  <a:srgbClr val="FFFFFF"/>
+                </a:solidFill>
+                <a:latin typeface="Calibri"/>
               </a:rPr>
               <a:t>Live Demo (recorded video)</a:t>
             </a:r>
@@ -4584,82 +5090,70 @@
       </p:sp>
       <p:sp>
         <p:nvSpPr>
-          <p:cNvPr id="3" name="Content Placeholder 2"/>
-          <p:cNvSpPr>
-            <a:spLocks noGrp="1"/>
-          </p:cNvSpPr>
-          <p:nvPr>
-            <p:ph idx="1"/>
-          </p:nvPr>
-        </p:nvSpPr>
-        <p:spPr/>
-        <p:txBody>
-          <a:bodyPr wrap="square"/>
-          <a:lstStyle/>
-          <a:p>
-            <a:pPr/>
-            <a:r>
-              <a:rPr sz="1600">
-                <a:solidFill>
-                  <a:srgbClr val="222222"/>
-                </a:solidFill>
-              </a:rPr>
-              <a:t>1. terraform apply walk-through (timelapse)</a:t>
-            </a:r>
-          </a:p>
-          <a:p>
-            <a:pPr/>
-            <a:r>
-              <a:rPr sz="1600">
-                <a:solidFill>
-                  <a:srgbClr val="222222"/>
-                </a:solidFill>
-              </a:rPr>
-              <a:t>2. Open ALB URL → dashboard, login as admin</a:t>
-            </a:r>
-          </a:p>
-          <a:p>
-            <a:pPr/>
-            <a:r>
-              <a:rPr sz="1600">
-                <a:solidFill>
-                  <a:srgbClr val="222222"/>
-                </a:solidFill>
-              </a:rPr>
-              <a:t>3. Create patient, book appointment, upload PDF (lands in S3)</a:t>
-            </a:r>
-          </a:p>
-          <a:p>
-            <a:pPr/>
-            <a:r>
-              <a:rPr sz="1600">
-                <a:solidFill>
-                  <a:srgbClr val="222222"/>
-                </a:solidFill>
-              </a:rPr>
-              <a:t>4. AWS Console: S3 object, RDS Performance Insights, CloudWatch Logs Insights query</a:t>
-            </a:r>
-          </a:p>
-          <a:p>
-            <a:pPr/>
-            <a:r>
-              <a:rPr sz="1600">
-                <a:solidFill>
-                  <a:srgbClr val="222222"/>
-                </a:solidFill>
-              </a:rPr>
-              <a:t>5. Trigger Lambda manually → SNS email arrives</a:t>
-            </a:r>
-          </a:p>
-          <a:p>
-            <a:pPr/>
-            <a:r>
-              <a:rPr sz="1600">
-                <a:solidFill>
-                  <a:srgbClr val="222222"/>
-                </a:solidFill>
-              </a:rPr>
-              <a:t>6. ab -n 5000 -c 50 http://&lt;alb&gt;/dashboard → ASG scales out</a:t>
+          <p:cNvPr id="6" name="TextBox 5"/>
+          <p:cNvSpPr txBox="1"/>
+          <p:nvPr/>
+        </p:nvSpPr>
+        <p:spPr>
+          <a:xfrm>
+            <a:off x="502920" y="6446520"/>
+            <a:ext cx="7315200" cy="274320"/>
+          </a:xfrm>
+          <a:prstGeom prst="rect">
+            <a:avLst/>
+          </a:prstGeom>
+          <a:noFill/>
+        </p:spPr>
+        <p:txBody>
+          <a:bodyPr wrap="square" lIns="0" rIns="0" tIns="0" bIns="0" anchor="t">
+            <a:spAutoFit/>
+          </a:bodyPr>
+          <a:lstStyle/>
+          <a:p>
+            <a:pPr algn="l"/>
+            <a:r>
+              <a:rPr sz="900" b="0">
+                <a:solidFill>
+                  <a:srgbClr val="555F6D"/>
+                </a:solidFill>
+                <a:latin typeface="Calibri"/>
+              </a:rPr>
+              <a:t>Cloud-Native Healthcare DMS  ·  BITS Pilani  ·  Group 23</a:t>
+            </a:r>
+          </a:p>
+        </p:txBody>
+      </p:sp>
+      <p:sp>
+        <p:nvSpPr>
+          <p:cNvPr id="7" name="TextBox 6"/>
+          <p:cNvSpPr txBox="1"/>
+          <p:nvPr/>
+        </p:nvSpPr>
+        <p:spPr>
+          <a:xfrm>
+            <a:off x="10515600" y="6446520"/>
+            <a:ext cx="1188720" cy="274320"/>
+          </a:xfrm>
+          <a:prstGeom prst="rect">
+            <a:avLst/>
+          </a:prstGeom>
+          <a:noFill/>
+        </p:spPr>
+        <p:txBody>
+          <a:bodyPr wrap="square" lIns="0" rIns="0" tIns="0" bIns="0" anchor="t">
+            <a:spAutoFit/>
+          </a:bodyPr>
+          <a:lstStyle/>
+          <a:p>
+            <a:pPr algn="r"/>
+            <a:r>
+              <a:rPr sz="900" b="0">
+                <a:solidFill>
+                  <a:srgbClr val="555F6D"/>
+                </a:solidFill>
+                <a:latin typeface="Calibri"/>
+              </a:rPr>
+              <a:t>11 / 14</a:t>
             </a:r>
           </a:p>
         </p:txBody>
@@ -4684,24 +5178,77 @@
       <p:grpSpPr/>
       <p:sp>
         <p:nvSpPr>
-          <p:cNvPr id="2" name="Title 1"/>
-          <p:cNvSpPr>
-            <a:spLocks noGrp="1"/>
-          </p:cNvSpPr>
-          <p:nvPr>
-            <p:ph type="title"/>
-          </p:nvPr>
-        </p:nvSpPr>
-        <p:spPr/>
-        <p:txBody>
-          <a:bodyPr/>
-          <a:lstStyle/>
-          <a:p>
-            <a:r>
-              <a:rPr b="1">
-                <a:solidFill>
-                  <a:srgbClr val="0B3D91"/>
-                </a:solidFill>
+          <p:cNvPr id="2" name="Rectangle 1"/>
+          <p:cNvSpPr/>
+          <p:nvPr/>
+        </p:nvSpPr>
+        <p:spPr>
+          <a:xfrm>
+            <a:off x="502920" y="365760"/>
+            <a:ext cx="164592" cy="777240"/>
+          </a:xfrm>
+          <a:prstGeom prst="rect">
+            <a:avLst/>
+          </a:prstGeom>
+          <a:solidFill>
+            <a:srgbClr val="109BC4"/>
+          </a:solidFill>
+          <a:ln>
+            <a:noFill/>
+          </a:ln>
+          <a:effectLst/>
+        </p:spPr>
+        <p:style>
+          <a:lnRef idx="1">
+            <a:schemeClr val="accent1"/>
+          </a:lnRef>
+          <a:fillRef idx="3">
+            <a:schemeClr val="accent1"/>
+          </a:fillRef>
+          <a:effectRef idx="2">
+            <a:schemeClr val="accent1"/>
+          </a:effectRef>
+          <a:fontRef idx="minor">
+            <a:schemeClr val="lt1"/>
+          </a:fontRef>
+        </p:style>
+        <p:txBody>
+          <a:bodyPr rtlCol="0" anchor="ctr"/>
+          <a:lstStyle/>
+          <a:p>
+            <a:pPr algn="ctr"/>
+          </a:p>
+        </p:txBody>
+      </p:sp>
+      <p:sp>
+        <p:nvSpPr>
+          <p:cNvPr id="3" name="TextBox 2"/>
+          <p:cNvSpPr txBox="1"/>
+          <p:nvPr/>
+        </p:nvSpPr>
+        <p:spPr>
+          <a:xfrm>
+            <a:off x="868680" y="365760"/>
+            <a:ext cx="10820095" cy="777240"/>
+          </a:xfrm>
+          <a:prstGeom prst="rect">
+            <a:avLst/>
+          </a:prstGeom>
+          <a:noFill/>
+        </p:spPr>
+        <p:txBody>
+          <a:bodyPr wrap="square" anchor="ctr">
+            <a:spAutoFit/>
+          </a:bodyPr>
+          <a:lstStyle/>
+          <a:p>
+            <a:pPr algn="l"/>
+            <a:r>
+              <a:rPr sz="2800" b="1">
+                <a:solidFill>
+                  <a:srgbClr val="0B2E6F"/>
+                </a:solidFill>
+                <a:latin typeface="Calibri"/>
               </a:rPr>
               <a:t>Roles &amp; Contributions</a:t>
             </a:r>
@@ -4710,71 +5257,380 @@
       </p:sp>
       <p:sp>
         <p:nvSpPr>
-          <p:cNvPr id="3" name="Content Placeholder 2"/>
-          <p:cNvSpPr>
-            <a:spLocks noGrp="1"/>
-          </p:cNvSpPr>
-          <p:nvPr>
-            <p:ph idx="1"/>
-          </p:nvPr>
-        </p:nvSpPr>
-        <p:spPr/>
-        <p:txBody>
-          <a:bodyPr wrap="square"/>
-          <a:lstStyle/>
-          <a:p>
-            <a:pPr/>
-            <a:r>
-              <a:rPr sz="1600">
-                <a:solidFill>
-                  <a:srgbClr val="222222"/>
-                </a:solidFill>
-              </a:rPr>
-              <a:t>Member — Phase 2 Contribution</a:t>
-            </a:r>
-          </a:p>
-          <a:p>
-            <a:pPr/>
-            <a:r>
-              <a:rPr sz="1600">
-                <a:solidFill>
-                  <a:srgbClr val="222222"/>
-                </a:solidFill>
-              </a:rPr>
-              <a:t>Karan Rawat — Architecture, Terraform network.tf / compute_ec2.tf, integration</a:t>
-            </a:r>
-          </a:p>
-          <a:p>
-            <a:pPr/>
-            <a:r>
-              <a:rPr sz="1600">
-                <a:solidFill>
-                  <a:srgbClr val="222222"/>
-                </a:solidFill>
-              </a:rPr>
-              <a:t>Vikas Kumar — RDS migration, SQLAlchemy review, Lambda data-access layer</a:t>
-            </a:r>
-          </a:p>
-          <a:p>
-            <a:pPr/>
-            <a:r>
-              <a:rPr sz="1600">
-                <a:solidFill>
-                  <a:srgbClr val="222222"/>
-                </a:solidFill>
-              </a:rPr>
-              <a:t>Kriti Tripathi — Security (KMS / IAM / CloudTrail), report writing, compliance mapping</a:t>
-            </a:r>
-          </a:p>
-          <a:p>
-            <a:pPr/>
-            <a:r>
-              <a:rPr sz="1600">
-                <a:solidFill>
-                  <a:srgbClr val="222222"/>
-                </a:solidFill>
-              </a:rPr>
-              <a:t>Avanish Pratap Singh — Test suite (29 tests, moto setup), CloudWatch / observability, demo recording</a:t>
+          <p:cNvPr id="4" name="Rectangle 3"/>
+          <p:cNvSpPr/>
+          <p:nvPr/>
+        </p:nvSpPr>
+        <p:spPr>
+          <a:xfrm>
+            <a:off x="868680" y="1188720"/>
+            <a:ext cx="1097280" cy="38100"/>
+          </a:xfrm>
+          <a:prstGeom prst="rect">
+            <a:avLst/>
+          </a:prstGeom>
+          <a:solidFill>
+            <a:srgbClr val="109BC4"/>
+          </a:solidFill>
+          <a:ln>
+            <a:noFill/>
+          </a:ln>
+          <a:effectLst/>
+        </p:spPr>
+        <p:style>
+          <a:lnRef idx="1">
+            <a:schemeClr val="accent1"/>
+          </a:lnRef>
+          <a:fillRef idx="3">
+            <a:schemeClr val="accent1"/>
+          </a:fillRef>
+          <a:effectRef idx="2">
+            <a:schemeClr val="accent1"/>
+          </a:effectRef>
+          <a:fontRef idx="minor">
+            <a:schemeClr val="lt1"/>
+          </a:fontRef>
+        </p:style>
+        <p:txBody>
+          <a:bodyPr rtlCol="0" anchor="ctr"/>
+          <a:lstStyle/>
+          <a:p>
+            <a:pPr algn="ctr"/>
+          </a:p>
+        </p:txBody>
+      </p:sp>
+      <p:graphicFrame>
+        <p:nvGraphicFramePr>
+          <p:cNvPr id="5" name="Table 4"/>
+          <p:cNvGraphicFramePr>
+            <a:graphicFrameLocks noGrp="1"/>
+          </p:cNvGraphicFramePr>
+          <p:nvPr/>
+        </p:nvGraphicFramePr>
+        <p:xfrm>
+          <a:off x="502920" y="1417320"/>
+          <a:ext cx="11185855" cy="1828800"/>
+        </p:xfrm>
+        <a:graphic>
+          <a:graphicData uri="http://schemas.openxmlformats.org/drawingml/2006/table">
+            <a:tbl>
+              <a:tblPr firstRow="1" bandRow="1">
+                <a:tableStyleId>{5C22544A-7EE6-4342-B048-85BDC9FD1C3A}</a:tableStyleId>
+              </a:tblPr>
+              <a:tblGrid>
+                <a:gridCol w="3355756"/>
+                <a:gridCol w="7830099"/>
+              </a:tblGrid>
+              <a:tr h="365760">
+                <a:tc>
+                  <a:txBody>
+                    <a:bodyPr wrap="square"/>
+                    <a:lstStyle/>
+                    <a:p>
+                      <a:pPr algn="l"/>
+                      <a:r>
+                        <a:rPr sz="1200" b="1">
+                          <a:solidFill>
+                            <a:srgbClr val="FFFFFF"/>
+                          </a:solidFill>
+                          <a:latin typeface="Calibri"/>
+                        </a:rPr>
+                        <a:t>Member</a:t>
+                      </a:r>
+                    </a:p>
+                  </a:txBody>
+                  <a:tcPr marL="73152" marR="73152" marT="36576" marB="36576">
+                    <a:solidFill>
+                      <a:srgbClr val="0B2E6F"/>
+                    </a:solidFill>
+                  </a:tcPr>
+                </a:tc>
+                <a:tc>
+                  <a:txBody>
+                    <a:bodyPr wrap="square"/>
+                    <a:lstStyle/>
+                    <a:p>
+                      <a:pPr algn="l"/>
+                      <a:r>
+                        <a:rPr sz="1200" b="1">
+                          <a:solidFill>
+                            <a:srgbClr val="FFFFFF"/>
+                          </a:solidFill>
+                          <a:latin typeface="Calibri"/>
+                        </a:rPr>
+                        <a:t>Phase 2 Contribution</a:t>
+                      </a:r>
+                    </a:p>
+                  </a:txBody>
+                  <a:tcPr marL="73152" marR="73152" marT="36576" marB="36576">
+                    <a:solidFill>
+                      <a:srgbClr val="0B2E6F"/>
+                    </a:solidFill>
+                  </a:tcPr>
+                </a:tc>
+              </a:tr>
+              <a:tr h="365760">
+                <a:tc>
+                  <a:txBody>
+                    <a:bodyPr wrap="square"/>
+                    <a:lstStyle/>
+                    <a:p>
+                      <a:pPr algn="l"/>
+                      <a:r>
+                        <a:rPr sz="1200">
+                          <a:solidFill>
+                            <a:srgbClr val="1A1A1A"/>
+                          </a:solidFill>
+                          <a:latin typeface="Calibri"/>
+                        </a:rPr>
+                        <a:t>Karan Rawat</a:t>
+                      </a:r>
+                    </a:p>
+                  </a:txBody>
+                  <a:tcPr marL="73152" marR="73152" marT="36576" marB="36576">
+                    <a:solidFill>
+                      <a:srgbClr val="FFFFFF"/>
+                    </a:solidFill>
+                  </a:tcPr>
+                </a:tc>
+                <a:tc>
+                  <a:txBody>
+                    <a:bodyPr wrap="square"/>
+                    <a:lstStyle/>
+                    <a:p>
+                      <a:pPr algn="l"/>
+                      <a:r>
+                        <a:rPr sz="1200">
+                          <a:solidFill>
+                            <a:srgbClr val="1A1A1A"/>
+                          </a:solidFill>
+                          <a:latin typeface="Calibri"/>
+                        </a:rPr>
+                        <a:t>Architecture, Terraform network.tf / compute_ec2.tf, integration</a:t>
+                      </a:r>
+                    </a:p>
+                  </a:txBody>
+                  <a:tcPr marL="73152" marR="73152" marT="36576" marB="36576">
+                    <a:solidFill>
+                      <a:srgbClr val="FFFFFF"/>
+                    </a:solidFill>
+                  </a:tcPr>
+                </a:tc>
+              </a:tr>
+              <a:tr h="365760">
+                <a:tc>
+                  <a:txBody>
+                    <a:bodyPr wrap="square"/>
+                    <a:lstStyle/>
+                    <a:p>
+                      <a:pPr algn="l"/>
+                      <a:r>
+                        <a:rPr sz="1200">
+                          <a:solidFill>
+                            <a:srgbClr val="1A1A1A"/>
+                          </a:solidFill>
+                          <a:latin typeface="Calibri"/>
+                        </a:rPr>
+                        <a:t>Vikas Kumar</a:t>
+                      </a:r>
+                    </a:p>
+                  </a:txBody>
+                  <a:tcPr marL="73152" marR="73152" marT="36576" marB="36576">
+                    <a:solidFill>
+                      <a:srgbClr val="EEF2F9"/>
+                    </a:solidFill>
+                  </a:tcPr>
+                </a:tc>
+                <a:tc>
+                  <a:txBody>
+                    <a:bodyPr wrap="square"/>
+                    <a:lstStyle/>
+                    <a:p>
+                      <a:pPr algn="l"/>
+                      <a:r>
+                        <a:rPr sz="1200">
+                          <a:solidFill>
+                            <a:srgbClr val="1A1A1A"/>
+                          </a:solidFill>
+                          <a:latin typeface="Calibri"/>
+                        </a:rPr>
+                        <a:t>RDS migration, SQLAlchemy review, Lambda data-access layer</a:t>
+                      </a:r>
+                    </a:p>
+                  </a:txBody>
+                  <a:tcPr marL="73152" marR="73152" marT="36576" marB="36576">
+                    <a:solidFill>
+                      <a:srgbClr val="EEF2F9"/>
+                    </a:solidFill>
+                  </a:tcPr>
+                </a:tc>
+              </a:tr>
+              <a:tr h="365760">
+                <a:tc>
+                  <a:txBody>
+                    <a:bodyPr wrap="square"/>
+                    <a:lstStyle/>
+                    <a:p>
+                      <a:pPr algn="l"/>
+                      <a:r>
+                        <a:rPr sz="1200">
+                          <a:solidFill>
+                            <a:srgbClr val="1A1A1A"/>
+                          </a:solidFill>
+                          <a:latin typeface="Calibri"/>
+                        </a:rPr>
+                        <a:t>Kriti Tripathi</a:t>
+                      </a:r>
+                    </a:p>
+                  </a:txBody>
+                  <a:tcPr marL="73152" marR="73152" marT="36576" marB="36576">
+                    <a:solidFill>
+                      <a:srgbClr val="FFFFFF"/>
+                    </a:solidFill>
+                  </a:tcPr>
+                </a:tc>
+                <a:tc>
+                  <a:txBody>
+                    <a:bodyPr wrap="square"/>
+                    <a:lstStyle/>
+                    <a:p>
+                      <a:pPr algn="l"/>
+                      <a:r>
+                        <a:rPr sz="1200">
+                          <a:solidFill>
+                            <a:srgbClr val="1A1A1A"/>
+                          </a:solidFill>
+                          <a:latin typeface="Calibri"/>
+                        </a:rPr>
+                        <a:t>Security (KMS / IAM / CloudTrail), report writing, compliance mapping</a:t>
+                      </a:r>
+                    </a:p>
+                  </a:txBody>
+                  <a:tcPr marL="73152" marR="73152" marT="36576" marB="36576">
+                    <a:solidFill>
+                      <a:srgbClr val="FFFFFF"/>
+                    </a:solidFill>
+                  </a:tcPr>
+                </a:tc>
+              </a:tr>
+              <a:tr h="365760">
+                <a:tc>
+                  <a:txBody>
+                    <a:bodyPr wrap="square"/>
+                    <a:lstStyle/>
+                    <a:p>
+                      <a:pPr algn="l"/>
+                      <a:r>
+                        <a:rPr sz="1200">
+                          <a:solidFill>
+                            <a:srgbClr val="1A1A1A"/>
+                          </a:solidFill>
+                          <a:latin typeface="Calibri"/>
+                        </a:rPr>
+                        <a:t>Avanish Pratap Singh</a:t>
+                      </a:r>
+                    </a:p>
+                  </a:txBody>
+                  <a:tcPr marL="73152" marR="73152" marT="36576" marB="36576">
+                    <a:solidFill>
+                      <a:srgbClr val="EEF2F9"/>
+                    </a:solidFill>
+                  </a:tcPr>
+                </a:tc>
+                <a:tc>
+                  <a:txBody>
+                    <a:bodyPr wrap="square"/>
+                    <a:lstStyle/>
+                    <a:p>
+                      <a:pPr algn="l"/>
+                      <a:r>
+                        <a:rPr sz="1200">
+                          <a:solidFill>
+                            <a:srgbClr val="1A1A1A"/>
+                          </a:solidFill>
+                          <a:latin typeface="Calibri"/>
+                        </a:rPr>
+                        <a:t>Test suite (29 tests, moto setup), CloudWatch / observability, demo recording</a:t>
+                      </a:r>
+                    </a:p>
+                  </a:txBody>
+                  <a:tcPr marL="73152" marR="73152" marT="36576" marB="36576">
+                    <a:solidFill>
+                      <a:srgbClr val="EEF2F9"/>
+                    </a:solidFill>
+                  </a:tcPr>
+                </a:tc>
+              </a:tr>
+            </a:tbl>
+          </a:graphicData>
+        </a:graphic>
+      </p:graphicFrame>
+      <p:sp>
+        <p:nvSpPr>
+          <p:cNvPr id="6" name="TextBox 5"/>
+          <p:cNvSpPr txBox="1"/>
+          <p:nvPr/>
+        </p:nvSpPr>
+        <p:spPr>
+          <a:xfrm>
+            <a:off x="502920" y="6446520"/>
+            <a:ext cx="7315200" cy="274320"/>
+          </a:xfrm>
+          <a:prstGeom prst="rect">
+            <a:avLst/>
+          </a:prstGeom>
+          <a:noFill/>
+        </p:spPr>
+        <p:txBody>
+          <a:bodyPr wrap="square" lIns="0" rIns="0" tIns="0" bIns="0" anchor="t">
+            <a:spAutoFit/>
+          </a:bodyPr>
+          <a:lstStyle/>
+          <a:p>
+            <a:pPr algn="l"/>
+            <a:r>
+              <a:rPr sz="900" b="0">
+                <a:solidFill>
+                  <a:srgbClr val="555F6D"/>
+                </a:solidFill>
+                <a:latin typeface="Calibri"/>
+              </a:rPr>
+              <a:t>Cloud-Native Healthcare DMS  ·  BITS Pilani  ·  Group 23</a:t>
+            </a:r>
+          </a:p>
+        </p:txBody>
+      </p:sp>
+      <p:sp>
+        <p:nvSpPr>
+          <p:cNvPr id="7" name="TextBox 6"/>
+          <p:cNvSpPr txBox="1"/>
+          <p:nvPr/>
+        </p:nvSpPr>
+        <p:spPr>
+          <a:xfrm>
+            <a:off x="10515600" y="6446520"/>
+            <a:ext cx="1188720" cy="274320"/>
+          </a:xfrm>
+          <a:prstGeom prst="rect">
+            <a:avLst/>
+          </a:prstGeom>
+          <a:noFill/>
+        </p:spPr>
+        <p:txBody>
+          <a:bodyPr wrap="square" lIns="0" rIns="0" tIns="0" bIns="0" anchor="t">
+            <a:spAutoFit/>
+          </a:bodyPr>
+          <a:lstStyle/>
+          <a:p>
+            <a:pPr algn="r"/>
+            <a:r>
+              <a:rPr sz="900" b="0">
+                <a:solidFill>
+                  <a:srgbClr val="555F6D"/>
+                </a:solidFill>
+                <a:latin typeface="Calibri"/>
+              </a:rPr>
+              <a:t>12 / 14</a:t>
             </a:r>
           </a:p>
         </p:txBody>
@@ -4799,24 +5655,77 @@
       <p:grpSpPr/>
       <p:sp>
         <p:nvSpPr>
-          <p:cNvPr id="2" name="Title 1"/>
-          <p:cNvSpPr>
-            <a:spLocks noGrp="1"/>
-          </p:cNvSpPr>
-          <p:nvPr>
-            <p:ph type="title"/>
-          </p:nvPr>
-        </p:nvSpPr>
-        <p:spPr/>
-        <p:txBody>
-          <a:bodyPr/>
-          <a:lstStyle/>
-          <a:p>
-            <a:r>
-              <a:rPr b="1">
-                <a:solidFill>
-                  <a:srgbClr val="0B3D91"/>
-                </a:solidFill>
+          <p:cNvPr id="2" name="Rectangle 1"/>
+          <p:cNvSpPr/>
+          <p:nvPr/>
+        </p:nvSpPr>
+        <p:spPr>
+          <a:xfrm>
+            <a:off x="502920" y="365760"/>
+            <a:ext cx="164592" cy="777240"/>
+          </a:xfrm>
+          <a:prstGeom prst="rect">
+            <a:avLst/>
+          </a:prstGeom>
+          <a:solidFill>
+            <a:srgbClr val="109BC4"/>
+          </a:solidFill>
+          <a:ln>
+            <a:noFill/>
+          </a:ln>
+          <a:effectLst/>
+        </p:spPr>
+        <p:style>
+          <a:lnRef idx="1">
+            <a:schemeClr val="accent1"/>
+          </a:lnRef>
+          <a:fillRef idx="3">
+            <a:schemeClr val="accent1"/>
+          </a:fillRef>
+          <a:effectRef idx="2">
+            <a:schemeClr val="accent1"/>
+          </a:effectRef>
+          <a:fontRef idx="minor">
+            <a:schemeClr val="lt1"/>
+          </a:fontRef>
+        </p:style>
+        <p:txBody>
+          <a:bodyPr rtlCol="0" anchor="ctr"/>
+          <a:lstStyle/>
+          <a:p>
+            <a:pPr algn="ctr"/>
+          </a:p>
+        </p:txBody>
+      </p:sp>
+      <p:sp>
+        <p:nvSpPr>
+          <p:cNvPr id="3" name="TextBox 2"/>
+          <p:cNvSpPr txBox="1"/>
+          <p:nvPr/>
+        </p:nvSpPr>
+        <p:spPr>
+          <a:xfrm>
+            <a:off x="868680" y="365760"/>
+            <a:ext cx="10820095" cy="777240"/>
+          </a:xfrm>
+          <a:prstGeom prst="rect">
+            <a:avLst/>
+          </a:prstGeom>
+          <a:noFill/>
+        </p:spPr>
+        <p:txBody>
+          <a:bodyPr wrap="square" anchor="ctr">
+            <a:spAutoFit/>
+          </a:bodyPr>
+          <a:lstStyle/>
+          <a:p>
+            <a:pPr algn="l"/>
+            <a:r>
+              <a:rPr sz="2800" b="1">
+                <a:solidFill>
+                  <a:srgbClr val="0B2E6F"/>
+                </a:solidFill>
+                <a:latin typeface="Calibri"/>
               </a:rPr>
               <a:t>Reflection (rubric-required)</a:t>
             </a:r>
@@ -4825,60 +5734,237 @@
       </p:sp>
       <p:sp>
         <p:nvSpPr>
-          <p:cNvPr id="3" name="Content Placeholder 2"/>
-          <p:cNvSpPr>
-            <a:spLocks noGrp="1"/>
-          </p:cNvSpPr>
-          <p:nvPr>
-            <p:ph idx="1"/>
-          </p:nvPr>
-        </p:nvSpPr>
-        <p:spPr/>
-        <p:txBody>
-          <a:bodyPr wrap="square"/>
-          <a:lstStyle/>
-          <a:p>
-            <a:pPr lvl="1"/>
-            <a:r>
-              <a:rPr sz="1400">
-                <a:solidFill>
-                  <a:srgbClr val="222222"/>
-                </a:solidFill>
+          <p:cNvPr id="4" name="Rectangle 3"/>
+          <p:cNvSpPr/>
+          <p:nvPr/>
+        </p:nvSpPr>
+        <p:spPr>
+          <a:xfrm>
+            <a:off x="868680" y="1188720"/>
+            <a:ext cx="1097280" cy="38100"/>
+          </a:xfrm>
+          <a:prstGeom prst="rect">
+            <a:avLst/>
+          </a:prstGeom>
+          <a:solidFill>
+            <a:srgbClr val="109BC4"/>
+          </a:solidFill>
+          <a:ln>
+            <a:noFill/>
+          </a:ln>
+          <a:effectLst/>
+        </p:spPr>
+        <p:style>
+          <a:lnRef idx="1">
+            <a:schemeClr val="accent1"/>
+          </a:lnRef>
+          <a:fillRef idx="3">
+            <a:schemeClr val="accent1"/>
+          </a:fillRef>
+          <a:effectRef idx="2">
+            <a:schemeClr val="accent1"/>
+          </a:effectRef>
+          <a:fontRef idx="minor">
+            <a:schemeClr val="lt1"/>
+          </a:fontRef>
+        </p:style>
+        <p:txBody>
+          <a:bodyPr rtlCol="0" anchor="ctr"/>
+          <a:lstStyle/>
+          <a:p>
+            <a:pPr algn="ctr"/>
+          </a:p>
+        </p:txBody>
+      </p:sp>
+      <p:sp>
+        <p:nvSpPr>
+          <p:cNvPr id="5" name="TextBox 4"/>
+          <p:cNvSpPr txBox="1"/>
+          <p:nvPr/>
+        </p:nvSpPr>
+        <p:spPr>
+          <a:xfrm>
+            <a:off x="502920" y="1417320"/>
+            <a:ext cx="11185855" cy="2011680"/>
+          </a:xfrm>
+          <a:prstGeom prst="rect">
+            <a:avLst/>
+          </a:prstGeom>
+          <a:noFill/>
+        </p:spPr>
+        <p:txBody>
+          <a:bodyPr wrap="square" lIns="0" tIns="0">
+            <a:spAutoFit/>
+          </a:bodyPr>
+          <a:lstStyle/>
+          <a:p>
+            <a:pPr algn="l">
+              <a:spcAft>
+                <a:spcPts val="400"/>
+              </a:spcAft>
+            </a:pPr>
+            <a:r>
+              <a:rPr sz="1800" b="1">
+                <a:solidFill>
+                  <a:srgbClr val="109BC4"/>
+                </a:solidFill>
+                <a:latin typeface="Calibri"/>
+              </a:rPr>
+              <a:t>▸  </a:t>
+            </a:r>
+            <a:r>
+              <a:rPr sz="1700">
+                <a:solidFill>
+                  <a:srgbClr val="1A1A1A"/>
+                </a:solidFill>
+                <a:latin typeface="Calibri"/>
               </a:rPr>
               <a:t>Workplace relevance: mirrors enterprise dev → staging → prod migrations</a:t>
             </a:r>
           </a:p>
           <a:p>
-            <a:pPr lvl="1"/>
-            <a:r>
-              <a:rPr sz="1400">
-                <a:solidFill>
-                  <a:srgbClr val="222222"/>
-                </a:solidFill>
+            <a:pPr algn="l">
+              <a:spcAft>
+                <a:spcPts val="400"/>
+              </a:spcAft>
+            </a:pPr>
+            <a:r>
+              <a:rPr sz="1800" b="1">
+                <a:solidFill>
+                  <a:srgbClr val="109BC4"/>
+                </a:solidFill>
+                <a:latin typeface="Calibri"/>
+              </a:rPr>
+              <a:t>▸  </a:t>
+            </a:r>
+            <a:r>
+              <a:rPr sz="1700">
+                <a:solidFill>
+                  <a:srgbClr val="1A1A1A"/>
+                </a:solidFill>
+                <a:latin typeface="Calibri"/>
               </a:rPr>
               <a:t>Concepts learned: IaC, IAM/KMS composition, mocked-AWS testing, cost-as-design-input</a:t>
             </a:r>
           </a:p>
           <a:p>
-            <a:pPr lvl="1"/>
-            <a:r>
-              <a:rPr sz="1400">
-                <a:solidFill>
-                  <a:srgbClr val="222222"/>
-                </a:solidFill>
+            <a:pPr algn="l">
+              <a:spcAft>
+                <a:spcPts val="400"/>
+              </a:spcAft>
+            </a:pPr>
+            <a:r>
+              <a:rPr sz="1800" b="1">
+                <a:solidFill>
+                  <a:srgbClr val="109BC4"/>
+                </a:solidFill>
+                <a:latin typeface="Calibri"/>
+              </a:rPr>
+              <a:t>▸  </a:t>
+            </a:r>
+            <a:r>
+              <a:rPr sz="1700">
+                <a:solidFill>
+                  <a:srgbClr val="1A1A1A"/>
+                </a:solidFill>
+                <a:latin typeface="Calibri"/>
               </a:rPr>
               <a:t>Trade-offs: RDS over DynamoDB; single NAT; t3.micro; deferred ACM/WAF — documented</a:t>
             </a:r>
           </a:p>
           <a:p>
-            <a:pPr lvl="1"/>
-            <a:r>
-              <a:rPr sz="1400">
-                <a:solidFill>
-                  <a:srgbClr val="222222"/>
-                </a:solidFill>
+            <a:pPr algn="l">
+              <a:spcAft>
+                <a:spcPts val="400"/>
+              </a:spcAft>
+            </a:pPr>
+            <a:r>
+              <a:rPr sz="1800" b="1">
+                <a:solidFill>
+                  <a:srgbClr val="109BC4"/>
+                </a:solidFill>
+                <a:latin typeface="Calibri"/>
+              </a:rPr>
+              <a:t>▸  </a:t>
+            </a:r>
+            <a:r>
+              <a:rPr sz="1700">
+                <a:solidFill>
+                  <a:srgbClr val="1A1A1A"/>
+                </a:solidFill>
+                <a:latin typeface="Calibri"/>
               </a:rPr>
               <a:t>Next iteration: Secrets Manager, App Runner / Fargate, integration smoke tests post-apply</a:t>
+            </a:r>
+          </a:p>
+        </p:txBody>
+      </p:sp>
+      <p:sp>
+        <p:nvSpPr>
+          <p:cNvPr id="6" name="TextBox 5"/>
+          <p:cNvSpPr txBox="1"/>
+          <p:nvPr/>
+        </p:nvSpPr>
+        <p:spPr>
+          <a:xfrm>
+            <a:off x="502920" y="6446520"/>
+            <a:ext cx="7315200" cy="274320"/>
+          </a:xfrm>
+          <a:prstGeom prst="rect">
+            <a:avLst/>
+          </a:prstGeom>
+          <a:noFill/>
+        </p:spPr>
+        <p:txBody>
+          <a:bodyPr wrap="square" lIns="0" rIns="0" tIns="0" bIns="0" anchor="t">
+            <a:spAutoFit/>
+          </a:bodyPr>
+          <a:lstStyle/>
+          <a:p>
+            <a:pPr algn="l"/>
+            <a:r>
+              <a:rPr sz="900" b="0">
+                <a:solidFill>
+                  <a:srgbClr val="555F6D"/>
+                </a:solidFill>
+                <a:latin typeface="Calibri"/>
+              </a:rPr>
+              <a:t>Cloud-Native Healthcare DMS  ·  BITS Pilani  ·  Group 23</a:t>
+            </a:r>
+          </a:p>
+        </p:txBody>
+      </p:sp>
+      <p:sp>
+        <p:nvSpPr>
+          <p:cNvPr id="7" name="TextBox 6"/>
+          <p:cNvSpPr txBox="1"/>
+          <p:nvPr/>
+        </p:nvSpPr>
+        <p:spPr>
+          <a:xfrm>
+            <a:off x="10515600" y="6446520"/>
+            <a:ext cx="1188720" cy="274320"/>
+          </a:xfrm>
+          <a:prstGeom prst="rect">
+            <a:avLst/>
+          </a:prstGeom>
+          <a:noFill/>
+        </p:spPr>
+        <p:txBody>
+          <a:bodyPr wrap="square" lIns="0" rIns="0" tIns="0" bIns="0" anchor="t">
+            <a:spAutoFit/>
+          </a:bodyPr>
+          <a:lstStyle/>
+          <a:p>
+            <a:pPr algn="r"/>
+            <a:r>
+              <a:rPr sz="900" b="0">
+                <a:solidFill>
+                  <a:srgbClr val="555F6D"/>
+                </a:solidFill>
+                <a:latin typeface="Calibri"/>
+              </a:rPr>
+              <a:t>13 / 14</a:t>
             </a:r>
           </a:p>
         </p:txBody>
@@ -4903,24 +5989,156 @@
       <p:grpSpPr/>
       <p:sp>
         <p:nvSpPr>
-          <p:cNvPr id="2" name="Title 1"/>
-          <p:cNvSpPr>
-            <a:spLocks noGrp="1"/>
-          </p:cNvSpPr>
-          <p:nvPr>
-            <p:ph type="title"/>
-          </p:nvPr>
-        </p:nvSpPr>
-        <p:spPr/>
-        <p:txBody>
-          <a:bodyPr/>
-          <a:lstStyle/>
-          <a:p>
-            <a:r>
-              <a:rPr b="1">
-                <a:solidFill>
-                  <a:srgbClr val="0B3D91"/>
-                </a:solidFill>
+          <p:cNvPr id="2" name="Rectangle 1"/>
+          <p:cNvSpPr/>
+          <p:nvPr/>
+        </p:nvSpPr>
+        <p:spPr>
+          <a:xfrm>
+            <a:off x="0" y="0"/>
+            <a:ext cx="12191695" cy="6858000"/>
+          </a:xfrm>
+          <a:prstGeom prst="rect">
+            <a:avLst/>
+          </a:prstGeom>
+          <a:solidFill>
+            <a:srgbClr val="0B2E6F"/>
+          </a:solidFill>
+          <a:ln>
+            <a:noFill/>
+          </a:ln>
+          <a:effectLst/>
+        </p:spPr>
+        <p:style>
+          <a:lnRef idx="1">
+            <a:schemeClr val="accent1"/>
+          </a:lnRef>
+          <a:fillRef idx="3">
+            <a:schemeClr val="accent1"/>
+          </a:fillRef>
+          <a:effectRef idx="2">
+            <a:schemeClr val="accent1"/>
+          </a:effectRef>
+          <a:fontRef idx="minor">
+            <a:schemeClr val="lt1"/>
+          </a:fontRef>
+        </p:style>
+        <p:txBody>
+          <a:bodyPr rtlCol="0" anchor="ctr"/>
+          <a:lstStyle/>
+          <a:p>
+            <a:pPr algn="ctr"/>
+          </a:p>
+        </p:txBody>
+      </p:sp>
+      <p:sp>
+        <p:nvSpPr>
+          <p:cNvPr id="3" name="Rectangle 2"/>
+          <p:cNvSpPr/>
+          <p:nvPr/>
+        </p:nvSpPr>
+        <p:spPr>
+          <a:xfrm>
+            <a:off x="0" y="3200400"/>
+            <a:ext cx="12191695" cy="38100"/>
+          </a:xfrm>
+          <a:prstGeom prst="rect">
+            <a:avLst/>
+          </a:prstGeom>
+          <a:solidFill>
+            <a:srgbClr val="109BC4"/>
+          </a:solidFill>
+          <a:ln>
+            <a:noFill/>
+          </a:ln>
+          <a:effectLst/>
+        </p:spPr>
+        <p:style>
+          <a:lnRef idx="1">
+            <a:schemeClr val="accent1"/>
+          </a:lnRef>
+          <a:fillRef idx="3">
+            <a:schemeClr val="accent1"/>
+          </a:fillRef>
+          <a:effectRef idx="2">
+            <a:schemeClr val="accent1"/>
+          </a:effectRef>
+          <a:fontRef idx="minor">
+            <a:schemeClr val="lt1"/>
+          </a:fontRef>
+        </p:style>
+        <p:txBody>
+          <a:bodyPr rtlCol="0" anchor="ctr"/>
+          <a:lstStyle/>
+          <a:p>
+            <a:pPr algn="ctr"/>
+          </a:p>
+        </p:txBody>
+      </p:sp>
+      <p:sp>
+        <p:nvSpPr>
+          <p:cNvPr id="4" name="TextBox 3"/>
+          <p:cNvSpPr txBox="1"/>
+          <p:nvPr/>
+        </p:nvSpPr>
+        <p:spPr>
+          <a:xfrm>
+            <a:off x="502920" y="2468880"/>
+            <a:ext cx="11185855" cy="548640"/>
+          </a:xfrm>
+          <a:prstGeom prst="rect">
+            <a:avLst/>
+          </a:prstGeom>
+          <a:noFill/>
+        </p:spPr>
+        <p:txBody>
+          <a:bodyPr wrap="square" lIns="0" rIns="0" tIns="0" bIns="0" anchor="t">
+            <a:spAutoFit/>
+          </a:bodyPr>
+          <a:lstStyle/>
+          <a:p>
+            <a:pPr algn="l"/>
+            <a:r>
+              <a:rPr sz="1800" b="1">
+                <a:solidFill>
+                  <a:srgbClr val="109BC4"/>
+                </a:solidFill>
+                <a:latin typeface="Calibri"/>
+              </a:rPr>
+              <a:t>Section</a:t>
+            </a:r>
+          </a:p>
+        </p:txBody>
+      </p:sp>
+      <p:sp>
+        <p:nvSpPr>
+          <p:cNvPr id="5" name="TextBox 4"/>
+          <p:cNvSpPr txBox="1"/>
+          <p:nvPr/>
+        </p:nvSpPr>
+        <p:spPr>
+          <a:xfrm>
+            <a:off x="502920" y="3383280"/>
+            <a:ext cx="11185855" cy="1371600"/>
+          </a:xfrm>
+          <a:prstGeom prst="rect">
+            <a:avLst/>
+          </a:prstGeom>
+          <a:noFill/>
+        </p:spPr>
+        <p:txBody>
+          <a:bodyPr wrap="square" lIns="0" rIns="0" tIns="0" bIns="0" anchor="t">
+            <a:spAutoFit/>
+          </a:bodyPr>
+          <a:lstStyle/>
+          <a:p>
+            <a:pPr algn="l"/>
+            <a:r>
+              <a:rPr sz="4400" b="1">
+                <a:solidFill>
+                  <a:srgbClr val="FFFFFF"/>
+                </a:solidFill>
+                <a:latin typeface="Calibri"/>
               </a:rPr>
               <a:t>Q&amp;A</a:t>
             </a:r>
@@ -4929,49 +6147,70 @@
       </p:sp>
       <p:sp>
         <p:nvSpPr>
-          <p:cNvPr id="3" name="Content Placeholder 2"/>
-          <p:cNvSpPr>
-            <a:spLocks noGrp="1"/>
-          </p:cNvSpPr>
-          <p:nvPr>
-            <p:ph idx="1"/>
-          </p:nvPr>
-        </p:nvSpPr>
-        <p:spPr/>
-        <p:txBody>
-          <a:bodyPr wrap="square"/>
-          <a:lstStyle/>
-          <a:p>
-            <a:pPr lvl="1"/>
-            <a:r>
-              <a:rPr sz="1400">
-                <a:solidFill>
-                  <a:srgbClr val="222222"/>
-                </a:solidFill>
-              </a:rPr>
-              <a:t>Repo: https://github.com/avanishpsingh/cloud-health-dms</a:t>
-            </a:r>
-          </a:p>
-          <a:p>
-            <a:pPr lvl="1"/>
-            <a:r>
-              <a:rPr sz="1400">
-                <a:solidFill>
-                  <a:srgbClr val="222222"/>
-                </a:solidFill>
-              </a:rPr>
-              <a:t>All deliverables in CC_Project_Implementation23.zip</a:t>
-            </a:r>
-          </a:p>
-          <a:p>
-            <a:pPr lvl="1"/>
-            <a:r>
-              <a:rPr sz="1400">
-                <a:solidFill>
-                  <a:srgbClr val="222222"/>
-                </a:solidFill>
-              </a:rPr>
-              <a:t>Thank you!</a:t>
+          <p:cNvPr id="6" name="TextBox 5"/>
+          <p:cNvSpPr txBox="1"/>
+          <p:nvPr/>
+        </p:nvSpPr>
+        <p:spPr>
+          <a:xfrm>
+            <a:off x="502920" y="6446520"/>
+            <a:ext cx="7315200" cy="274320"/>
+          </a:xfrm>
+          <a:prstGeom prst="rect">
+            <a:avLst/>
+          </a:prstGeom>
+          <a:noFill/>
+        </p:spPr>
+        <p:txBody>
+          <a:bodyPr wrap="square" lIns="0" rIns="0" tIns="0" bIns="0" anchor="t">
+            <a:spAutoFit/>
+          </a:bodyPr>
+          <a:lstStyle/>
+          <a:p>
+            <a:pPr algn="l"/>
+            <a:r>
+              <a:rPr sz="900" b="0">
+                <a:solidFill>
+                  <a:srgbClr val="555F6D"/>
+                </a:solidFill>
+                <a:latin typeface="Calibri"/>
+              </a:rPr>
+              <a:t>Cloud-Native Healthcare DMS  ·  BITS Pilani  ·  Group 23</a:t>
+            </a:r>
+          </a:p>
+        </p:txBody>
+      </p:sp>
+      <p:sp>
+        <p:nvSpPr>
+          <p:cNvPr id="7" name="TextBox 6"/>
+          <p:cNvSpPr txBox="1"/>
+          <p:nvPr/>
+        </p:nvSpPr>
+        <p:spPr>
+          <a:xfrm>
+            <a:off x="10515600" y="6446520"/>
+            <a:ext cx="1188720" cy="274320"/>
+          </a:xfrm>
+          <a:prstGeom prst="rect">
+            <a:avLst/>
+          </a:prstGeom>
+          <a:noFill/>
+        </p:spPr>
+        <p:txBody>
+          <a:bodyPr wrap="square" lIns="0" rIns="0" tIns="0" bIns="0" anchor="t">
+            <a:spAutoFit/>
+          </a:bodyPr>
+          <a:lstStyle/>
+          <a:p>
+            <a:pPr algn="r"/>
+            <a:r>
+              <a:rPr sz="900" b="0">
+                <a:solidFill>
+                  <a:srgbClr val="555F6D"/>
+                </a:solidFill>
+                <a:latin typeface="Calibri"/>
+              </a:rPr>
+              <a:t>14 / 14</a:t>
             </a:r>
           </a:p>
         </p:txBody>
@@ -4996,24 +6235,77 @@
       <p:grpSpPr/>
       <p:sp>
         <p:nvSpPr>
-          <p:cNvPr id="2" name="Title 1"/>
-          <p:cNvSpPr>
-            <a:spLocks noGrp="1"/>
-          </p:cNvSpPr>
-          <p:nvPr>
-            <p:ph type="title"/>
-          </p:nvPr>
-        </p:nvSpPr>
-        <p:spPr/>
-        <p:txBody>
-          <a:bodyPr/>
-          <a:lstStyle/>
-          <a:p>
-            <a:r>
-              <a:rPr b="1">
-                <a:solidFill>
-                  <a:srgbClr val="0B3D91"/>
-                </a:solidFill>
+          <p:cNvPr id="2" name="Rectangle 1"/>
+          <p:cNvSpPr/>
+          <p:nvPr/>
+        </p:nvSpPr>
+        <p:spPr>
+          <a:xfrm>
+            <a:off x="502920" y="365760"/>
+            <a:ext cx="164592" cy="777240"/>
+          </a:xfrm>
+          <a:prstGeom prst="rect">
+            <a:avLst/>
+          </a:prstGeom>
+          <a:solidFill>
+            <a:srgbClr val="109BC4"/>
+          </a:solidFill>
+          <a:ln>
+            <a:noFill/>
+          </a:ln>
+          <a:effectLst/>
+        </p:spPr>
+        <p:style>
+          <a:lnRef idx="1">
+            <a:schemeClr val="accent1"/>
+          </a:lnRef>
+          <a:fillRef idx="3">
+            <a:schemeClr val="accent1"/>
+          </a:fillRef>
+          <a:effectRef idx="2">
+            <a:schemeClr val="accent1"/>
+          </a:effectRef>
+          <a:fontRef idx="minor">
+            <a:schemeClr val="lt1"/>
+          </a:fontRef>
+        </p:style>
+        <p:txBody>
+          <a:bodyPr rtlCol="0" anchor="ctr"/>
+          <a:lstStyle/>
+          <a:p>
+            <a:pPr algn="ctr"/>
+          </a:p>
+        </p:txBody>
+      </p:sp>
+      <p:sp>
+        <p:nvSpPr>
+          <p:cNvPr id="3" name="TextBox 2"/>
+          <p:cNvSpPr txBox="1"/>
+          <p:nvPr/>
+        </p:nvSpPr>
+        <p:spPr>
+          <a:xfrm>
+            <a:off x="868680" y="365760"/>
+            <a:ext cx="10820095" cy="777240"/>
+          </a:xfrm>
+          <a:prstGeom prst="rect">
+            <a:avLst/>
+          </a:prstGeom>
+          <a:noFill/>
+        </p:spPr>
+        <p:txBody>
+          <a:bodyPr wrap="square" anchor="ctr">
+            <a:spAutoFit/>
+          </a:bodyPr>
+          <a:lstStyle/>
+          <a:p>
+            <a:pPr algn="l"/>
+            <a:r>
+              <a:rPr sz="2800" b="1">
+                <a:solidFill>
+                  <a:srgbClr val="0B2E6F"/>
+                </a:solidFill>
+                <a:latin typeface="Calibri"/>
               </a:rPr>
               <a:t>Recap: Problem &amp; Phase-1 Objectives</a:t>
             </a:r>
@@ -5022,49 +6314,212 @@
       </p:sp>
       <p:sp>
         <p:nvSpPr>
-          <p:cNvPr id="3" name="Content Placeholder 2"/>
-          <p:cNvSpPr>
-            <a:spLocks noGrp="1"/>
-          </p:cNvSpPr>
-          <p:nvPr>
-            <p:ph idx="1"/>
-          </p:nvPr>
-        </p:nvSpPr>
-        <p:spPr/>
-        <p:txBody>
-          <a:bodyPr wrap="square"/>
-          <a:lstStyle/>
-          <a:p>
-            <a:pPr lvl="1"/>
-            <a:r>
-              <a:rPr sz="1400">
-                <a:solidFill>
-                  <a:srgbClr val="222222"/>
-                </a:solidFill>
+          <p:cNvPr id="4" name="Rectangle 3"/>
+          <p:cNvSpPr/>
+          <p:nvPr/>
+        </p:nvSpPr>
+        <p:spPr>
+          <a:xfrm>
+            <a:off x="868680" y="1188720"/>
+            <a:ext cx="1097280" cy="38100"/>
+          </a:xfrm>
+          <a:prstGeom prst="rect">
+            <a:avLst/>
+          </a:prstGeom>
+          <a:solidFill>
+            <a:srgbClr val="109BC4"/>
+          </a:solidFill>
+          <a:ln>
+            <a:noFill/>
+          </a:ln>
+          <a:effectLst/>
+        </p:spPr>
+        <p:style>
+          <a:lnRef idx="1">
+            <a:schemeClr val="accent1"/>
+          </a:lnRef>
+          <a:fillRef idx="3">
+            <a:schemeClr val="accent1"/>
+          </a:fillRef>
+          <a:effectRef idx="2">
+            <a:schemeClr val="accent1"/>
+          </a:effectRef>
+          <a:fontRef idx="minor">
+            <a:schemeClr val="lt1"/>
+          </a:fontRef>
+        </p:style>
+        <p:txBody>
+          <a:bodyPr rtlCol="0" anchor="ctr"/>
+          <a:lstStyle/>
+          <a:p>
+            <a:pPr algn="ctr"/>
+          </a:p>
+        </p:txBody>
+      </p:sp>
+      <p:sp>
+        <p:nvSpPr>
+          <p:cNvPr id="5" name="TextBox 4"/>
+          <p:cNvSpPr txBox="1"/>
+          <p:nvPr/>
+        </p:nvSpPr>
+        <p:spPr>
+          <a:xfrm>
+            <a:off x="502920" y="1417320"/>
+            <a:ext cx="11185855" cy="1554480"/>
+          </a:xfrm>
+          <a:prstGeom prst="rect">
+            <a:avLst/>
+          </a:prstGeom>
+          <a:noFill/>
+        </p:spPr>
+        <p:txBody>
+          <a:bodyPr wrap="square" lIns="0" tIns="0">
+            <a:spAutoFit/>
+          </a:bodyPr>
+          <a:lstStyle/>
+          <a:p>
+            <a:pPr algn="l">
+              <a:spcAft>
+                <a:spcPts val="400"/>
+              </a:spcAft>
+            </a:pPr>
+            <a:r>
+              <a:rPr sz="1800" b="1">
+                <a:solidFill>
+                  <a:srgbClr val="109BC4"/>
+                </a:solidFill>
+                <a:latin typeface="Calibri"/>
+              </a:rPr>
+              <a:t>▸  </a:t>
+            </a:r>
+            <a:r>
+              <a:rPr sz="1700">
+                <a:solidFill>
+                  <a:srgbClr val="1A1A1A"/>
+                </a:solidFill>
+                <a:latin typeface="Calibri"/>
               </a:rPr>
               <a:t>Mid-size hospital chain in India, fragmented on-prem IT</a:t>
             </a:r>
           </a:p>
           <a:p>
-            <a:pPr lvl="1"/>
-            <a:r>
-              <a:rPr sz="1400">
-                <a:solidFill>
-                  <a:srgbClr val="222222"/>
-                </a:solidFill>
+            <a:pPr algn="l">
+              <a:spcAft>
+                <a:spcPts val="400"/>
+              </a:spcAft>
+            </a:pPr>
+            <a:r>
+              <a:rPr sz="1800" b="1">
+                <a:solidFill>
+                  <a:srgbClr val="109BC4"/>
+                </a:solidFill>
+                <a:latin typeface="Calibri"/>
+              </a:rPr>
+              <a:t>▸  </a:t>
+            </a:r>
+            <a:r>
+              <a:rPr sz="1700">
+                <a:solidFill>
+                  <a:srgbClr val="1A1A1A"/>
+                </a:solidFill>
+                <a:latin typeface="Calibri"/>
               </a:rPr>
               <a:t>Pain: peak-hour overload, data silos, audit gaps, idle hardware</a:t>
             </a:r>
           </a:p>
           <a:p>
-            <a:pPr lvl="1"/>
-            <a:r>
-              <a:rPr sz="1400">
-                <a:solidFill>
-                  <a:srgbClr val="222222"/>
-                </a:solidFill>
+            <a:pPr algn="l">
+              <a:spcAft>
+                <a:spcPts val="400"/>
+              </a:spcAft>
+            </a:pPr>
+            <a:r>
+              <a:rPr sz="1800" b="1">
+                <a:solidFill>
+                  <a:srgbClr val="109BC4"/>
+                </a:solidFill>
+                <a:latin typeface="Calibri"/>
+              </a:rPr>
+              <a:t>▸  </a:t>
+            </a:r>
+            <a:r>
+              <a:rPr sz="1700">
+                <a:solidFill>
+                  <a:srgbClr val="1A1A1A"/>
+                </a:solidFill>
+                <a:latin typeface="Calibri"/>
               </a:rPr>
               <a:t>6 measurable objectives (O1–O6) defined in Phase 1</a:t>
+            </a:r>
+          </a:p>
+        </p:txBody>
+      </p:sp>
+      <p:sp>
+        <p:nvSpPr>
+          <p:cNvPr id="6" name="TextBox 5"/>
+          <p:cNvSpPr txBox="1"/>
+          <p:nvPr/>
+        </p:nvSpPr>
+        <p:spPr>
+          <a:xfrm>
+            <a:off x="502920" y="6446520"/>
+            <a:ext cx="7315200" cy="274320"/>
+          </a:xfrm>
+          <a:prstGeom prst="rect">
+            <a:avLst/>
+          </a:prstGeom>
+          <a:noFill/>
+        </p:spPr>
+        <p:txBody>
+          <a:bodyPr wrap="square" lIns="0" rIns="0" tIns="0" bIns="0" anchor="t">
+            <a:spAutoFit/>
+          </a:bodyPr>
+          <a:lstStyle/>
+          <a:p>
+            <a:pPr algn="l"/>
+            <a:r>
+              <a:rPr sz="900" b="0">
+                <a:solidFill>
+                  <a:srgbClr val="555F6D"/>
+                </a:solidFill>
+                <a:latin typeface="Calibri"/>
+              </a:rPr>
+              <a:t>Cloud-Native Healthcare DMS  ·  BITS Pilani  ·  Group 23</a:t>
+            </a:r>
+          </a:p>
+        </p:txBody>
+      </p:sp>
+      <p:sp>
+        <p:nvSpPr>
+          <p:cNvPr id="7" name="TextBox 6"/>
+          <p:cNvSpPr txBox="1"/>
+          <p:nvPr/>
+        </p:nvSpPr>
+        <p:spPr>
+          <a:xfrm>
+            <a:off x="10515600" y="6446520"/>
+            <a:ext cx="1188720" cy="274320"/>
+          </a:xfrm>
+          <a:prstGeom prst="rect">
+            <a:avLst/>
+          </a:prstGeom>
+          <a:noFill/>
+        </p:spPr>
+        <p:txBody>
+          <a:bodyPr wrap="square" lIns="0" rIns="0" tIns="0" bIns="0" anchor="t">
+            <a:spAutoFit/>
+          </a:bodyPr>
+          <a:lstStyle/>
+          <a:p>
+            <a:pPr algn="r"/>
+            <a:r>
+              <a:rPr sz="900" b="0">
+                <a:solidFill>
+                  <a:srgbClr val="555F6D"/>
+                </a:solidFill>
+                <a:latin typeface="Calibri"/>
+              </a:rPr>
+              <a:t>2 / 14</a:t>
             </a:r>
           </a:p>
         </p:txBody>
@@ -5089,24 +6544,77 @@
       <p:grpSpPr/>
       <p:sp>
         <p:nvSpPr>
-          <p:cNvPr id="2" name="Title 1"/>
-          <p:cNvSpPr>
-            <a:spLocks noGrp="1"/>
-          </p:cNvSpPr>
-          <p:nvPr>
-            <p:ph type="title"/>
-          </p:nvPr>
-        </p:nvSpPr>
-        <p:spPr/>
-        <p:txBody>
-          <a:bodyPr/>
-          <a:lstStyle/>
-          <a:p>
-            <a:r>
-              <a:rPr b="1">
-                <a:solidFill>
-                  <a:srgbClr val="0B3D91"/>
-                </a:solidFill>
+          <p:cNvPr id="2" name="Rectangle 1"/>
+          <p:cNvSpPr/>
+          <p:nvPr/>
+        </p:nvSpPr>
+        <p:spPr>
+          <a:xfrm>
+            <a:off x="502920" y="365760"/>
+            <a:ext cx="164592" cy="777240"/>
+          </a:xfrm>
+          <a:prstGeom prst="rect">
+            <a:avLst/>
+          </a:prstGeom>
+          <a:solidFill>
+            <a:srgbClr val="109BC4"/>
+          </a:solidFill>
+          <a:ln>
+            <a:noFill/>
+          </a:ln>
+          <a:effectLst/>
+        </p:spPr>
+        <p:style>
+          <a:lnRef idx="1">
+            <a:schemeClr val="accent1"/>
+          </a:lnRef>
+          <a:fillRef idx="3">
+            <a:schemeClr val="accent1"/>
+          </a:fillRef>
+          <a:effectRef idx="2">
+            <a:schemeClr val="accent1"/>
+          </a:effectRef>
+          <a:fontRef idx="minor">
+            <a:schemeClr val="lt1"/>
+          </a:fontRef>
+        </p:style>
+        <p:txBody>
+          <a:bodyPr rtlCol="0" anchor="ctr"/>
+          <a:lstStyle/>
+          <a:p>
+            <a:pPr algn="ctr"/>
+          </a:p>
+        </p:txBody>
+      </p:sp>
+      <p:sp>
+        <p:nvSpPr>
+          <p:cNvPr id="3" name="TextBox 2"/>
+          <p:cNvSpPr txBox="1"/>
+          <p:nvPr/>
+        </p:nvSpPr>
+        <p:spPr>
+          <a:xfrm>
+            <a:off x="868680" y="365760"/>
+            <a:ext cx="10820095" cy="777240"/>
+          </a:xfrm>
+          <a:prstGeom prst="rect">
+            <a:avLst/>
+          </a:prstGeom>
+          <a:noFill/>
+        </p:spPr>
+        <p:txBody>
+          <a:bodyPr wrap="square" anchor="ctr">
+            <a:spAutoFit/>
+          </a:bodyPr>
+          <a:lstStyle/>
+          <a:p>
+            <a:pPr algn="l"/>
+            <a:r>
+              <a:rPr sz="2800" b="1">
+                <a:solidFill>
+                  <a:srgbClr val="0B2E6F"/>
+                </a:solidFill>
+                <a:latin typeface="Calibri"/>
               </a:rPr>
               <a:t>Phase-2 Architecture (one diagram)</a:t>
             </a:r>
@@ -5115,67 +6623,241 @@
       </p:sp>
       <p:sp>
         <p:nvSpPr>
-          <p:cNvPr id="3" name="Content Placeholder 2"/>
-          <p:cNvSpPr>
-            <a:spLocks noGrp="1"/>
-          </p:cNvSpPr>
-          <p:nvPr>
-            <p:ph idx="1"/>
-          </p:nvPr>
-        </p:nvSpPr>
-        <p:spPr/>
-        <p:txBody>
-          <a:bodyPr wrap="square"/>
-          <a:lstStyle/>
-          <a:p>
-            <a:r>
-              <a:rPr sz="1000">
-                <a:solidFill>
-                  <a:srgbClr val="666666"/>
+          <p:cNvPr id="4" name="Rectangle 3"/>
+          <p:cNvSpPr/>
+          <p:nvPr/>
+        </p:nvSpPr>
+        <p:spPr>
+          <a:xfrm>
+            <a:off x="868680" y="1188720"/>
+            <a:ext cx="1097280" cy="38100"/>
+          </a:xfrm>
+          <a:prstGeom prst="rect">
+            <a:avLst/>
+          </a:prstGeom>
+          <a:solidFill>
+            <a:srgbClr val="109BC4"/>
+          </a:solidFill>
+          <a:ln>
+            <a:noFill/>
+          </a:ln>
+          <a:effectLst/>
+        </p:spPr>
+        <p:style>
+          <a:lnRef idx="1">
+            <a:schemeClr val="accent1"/>
+          </a:lnRef>
+          <a:fillRef idx="3">
+            <a:schemeClr val="accent1"/>
+          </a:fillRef>
+          <a:effectRef idx="2">
+            <a:schemeClr val="accent1"/>
+          </a:effectRef>
+          <a:fontRef idx="minor">
+            <a:schemeClr val="lt1"/>
+          </a:fontRef>
+        </p:style>
+        <p:txBody>
+          <a:bodyPr rtlCol="0" anchor="ctr"/>
+          <a:lstStyle/>
+          <a:p>
+            <a:pPr algn="ctr"/>
+          </a:p>
+        </p:txBody>
+      </p:sp>
+      <p:sp>
+        <p:nvSpPr>
+          <p:cNvPr id="5" name="Rectangle 4"/>
+          <p:cNvSpPr/>
+          <p:nvPr/>
+        </p:nvSpPr>
+        <p:spPr>
+          <a:xfrm>
+            <a:off x="502920" y="1417320"/>
+            <a:ext cx="11185855" cy="1645920"/>
+          </a:xfrm>
+          <a:prstGeom prst="rect">
+            <a:avLst/>
+          </a:prstGeom>
+          <a:solidFill>
+            <a:srgbClr val="F4F6FB"/>
+          </a:solidFill>
+          <a:ln>
+            <a:noFill/>
+          </a:ln>
+          <a:effectLst/>
+        </p:spPr>
+        <p:style>
+          <a:lnRef idx="1">
+            <a:schemeClr val="accent1"/>
+          </a:lnRef>
+          <a:fillRef idx="3">
+            <a:schemeClr val="accent1"/>
+          </a:fillRef>
+          <a:effectRef idx="2">
+            <a:schemeClr val="accent1"/>
+          </a:effectRef>
+          <a:fontRef idx="minor">
+            <a:schemeClr val="lt1"/>
+          </a:fontRef>
+        </p:style>
+        <p:txBody>
+          <a:bodyPr rtlCol="0" anchor="ctr"/>
+          <a:lstStyle/>
+          <a:p>
+            <a:pPr algn="ctr"/>
+          </a:p>
+        </p:txBody>
+      </p:sp>
+      <p:sp>
+        <p:nvSpPr>
+          <p:cNvPr id="6" name="TextBox 5"/>
+          <p:cNvSpPr txBox="1"/>
+          <p:nvPr/>
+        </p:nvSpPr>
+        <p:spPr>
+          <a:xfrm>
+            <a:off x="640080" y="1508760"/>
+            <a:ext cx="10911535" cy="1463040"/>
+          </a:xfrm>
+          <a:prstGeom prst="rect">
+            <a:avLst/>
+          </a:prstGeom>
+          <a:noFill/>
+        </p:spPr>
+        <p:txBody>
+          <a:bodyPr wrap="none" lIns="0" tIns="0">
+            <a:spAutoFit/>
+          </a:bodyPr>
+          <a:lstStyle/>
+          <a:p>
+            <a:pPr algn="l"/>
+            <a:r>
+              <a:rPr sz="1100">
+                <a:solidFill>
+                  <a:srgbClr val="555F6D"/>
                 </a:solidFill>
                 <a:latin typeface="Consolas"/>
               </a:rPr>
               <a:t>Users → Route 53 → ALB → EC2 ASG (private) → RDS PostgreSQL Multi-AZ</a:t>
             </a:r>
-            <a:br/>
-            <a:r>
-              <a:rPr sz="1000">
-                <a:solidFill>
-                  <a:srgbClr val="666666"/>
+          </a:p>
+          <a:p>
+            <a:pPr algn="l"/>
+            <a:r>
+              <a:rPr sz="1100">
+                <a:solidFill>
+                  <a:srgbClr val="555F6D"/>
                 </a:solidFill>
                 <a:latin typeface="Consolas"/>
               </a:rPr>
               <a:t>                                ↘</a:t>
             </a:r>
-            <a:br/>
-            <a:r>
-              <a:rPr sz="1000">
-                <a:solidFill>
-                  <a:srgbClr val="666666"/>
+          </a:p>
+          <a:p>
+            <a:pPr algn="l"/>
+            <a:r>
+              <a:rPr sz="1100">
+                <a:solidFill>
+                  <a:srgbClr val="555F6D"/>
                 </a:solidFill>
                 <a:latin typeface="Consolas"/>
               </a:rPr>
               <a:t>                                  S3 (KMS) ←─ Lambda ←─ EventBridge cron</a:t>
             </a:r>
-            <a:br/>
-            <a:r>
-              <a:rPr sz="1000">
-                <a:solidFill>
-                  <a:srgbClr val="666666"/>
+          </a:p>
+          <a:p>
+            <a:pPr algn="l"/>
+            <a:r>
+              <a:rPr sz="1100">
+                <a:solidFill>
+                  <a:srgbClr val="555F6D"/>
                 </a:solidFill>
                 <a:latin typeface="Consolas"/>
               </a:rPr>
               <a:t>                                                    ↘ SNS → Email/SMS</a:t>
             </a:r>
-            <a:br/>
-            <a:r>
-              <a:rPr sz="1000">
-                <a:solidFill>
-                  <a:srgbClr val="666666"/>
+          </a:p>
+          <a:p>
+            <a:pPr algn="l"/>
+            <a:r>
+              <a:rPr sz="1100">
+                <a:solidFill>
+                  <a:srgbClr val="555F6D"/>
                 </a:solidFill>
                 <a:latin typeface="Consolas"/>
               </a:rPr>
               <a:t>Cross-cutting: VPC · IAM · KMS · CloudTrail · CloudWatch</a:t>
+            </a:r>
+          </a:p>
+        </p:txBody>
+      </p:sp>
+      <p:sp>
+        <p:nvSpPr>
+          <p:cNvPr id="7" name="TextBox 6"/>
+          <p:cNvSpPr txBox="1"/>
+          <p:nvPr/>
+        </p:nvSpPr>
+        <p:spPr>
+          <a:xfrm>
+            <a:off x="502920" y="6446520"/>
+            <a:ext cx="7315200" cy="274320"/>
+          </a:xfrm>
+          <a:prstGeom prst="rect">
+            <a:avLst/>
+          </a:prstGeom>
+          <a:noFill/>
+        </p:spPr>
+        <p:txBody>
+          <a:bodyPr wrap="square" lIns="0" rIns="0" tIns="0" bIns="0" anchor="t">
+            <a:spAutoFit/>
+          </a:bodyPr>
+          <a:lstStyle/>
+          <a:p>
+            <a:pPr algn="l"/>
+            <a:r>
+              <a:rPr sz="900" b="0">
+                <a:solidFill>
+                  <a:srgbClr val="555F6D"/>
+                </a:solidFill>
+                <a:latin typeface="Calibri"/>
+              </a:rPr>
+              <a:t>Cloud-Native Healthcare DMS  ·  BITS Pilani  ·  Group 23</a:t>
+            </a:r>
+          </a:p>
+        </p:txBody>
+      </p:sp>
+      <p:sp>
+        <p:nvSpPr>
+          <p:cNvPr id="8" name="TextBox 7"/>
+          <p:cNvSpPr txBox="1"/>
+          <p:nvPr/>
+        </p:nvSpPr>
+        <p:spPr>
+          <a:xfrm>
+            <a:off x="10515600" y="6446520"/>
+            <a:ext cx="1188720" cy="274320"/>
+          </a:xfrm>
+          <a:prstGeom prst="rect">
+            <a:avLst/>
+          </a:prstGeom>
+          <a:noFill/>
+        </p:spPr>
+        <p:txBody>
+          <a:bodyPr wrap="square" lIns="0" rIns="0" tIns="0" bIns="0" anchor="t">
+            <a:spAutoFit/>
+          </a:bodyPr>
+          <a:lstStyle/>
+          <a:p>
+            <a:pPr algn="r"/>
+            <a:r>
+              <a:rPr sz="900" b="0">
+                <a:solidFill>
+                  <a:srgbClr val="555F6D"/>
+                </a:solidFill>
+                <a:latin typeface="Calibri"/>
+              </a:rPr>
+              <a:t>3 / 14</a:t>
             </a:r>
           </a:p>
         </p:txBody>
@@ -5200,24 +6882,77 @@
       <p:grpSpPr/>
       <p:sp>
         <p:nvSpPr>
-          <p:cNvPr id="2" name="Title 1"/>
-          <p:cNvSpPr>
-            <a:spLocks noGrp="1"/>
-          </p:cNvSpPr>
-          <p:nvPr>
-            <p:ph type="title"/>
-          </p:nvPr>
-        </p:nvSpPr>
-        <p:spPr/>
-        <p:txBody>
-          <a:bodyPr/>
-          <a:lstStyle/>
-          <a:p>
-            <a:r>
-              <a:rPr b="1">
-                <a:solidFill>
-                  <a:srgbClr val="0B3D91"/>
-                </a:solidFill>
+          <p:cNvPr id="2" name="Rectangle 1"/>
+          <p:cNvSpPr/>
+          <p:nvPr/>
+        </p:nvSpPr>
+        <p:spPr>
+          <a:xfrm>
+            <a:off x="502920" y="365760"/>
+            <a:ext cx="164592" cy="777240"/>
+          </a:xfrm>
+          <a:prstGeom prst="rect">
+            <a:avLst/>
+          </a:prstGeom>
+          <a:solidFill>
+            <a:srgbClr val="109BC4"/>
+          </a:solidFill>
+          <a:ln>
+            <a:noFill/>
+          </a:ln>
+          <a:effectLst/>
+        </p:spPr>
+        <p:style>
+          <a:lnRef idx="1">
+            <a:schemeClr val="accent1"/>
+          </a:lnRef>
+          <a:fillRef idx="3">
+            <a:schemeClr val="accent1"/>
+          </a:fillRef>
+          <a:effectRef idx="2">
+            <a:schemeClr val="accent1"/>
+          </a:effectRef>
+          <a:fontRef idx="minor">
+            <a:schemeClr val="lt1"/>
+          </a:fontRef>
+        </p:style>
+        <p:txBody>
+          <a:bodyPr rtlCol="0" anchor="ctr"/>
+          <a:lstStyle/>
+          <a:p>
+            <a:pPr algn="ctr"/>
+          </a:p>
+        </p:txBody>
+      </p:sp>
+      <p:sp>
+        <p:nvSpPr>
+          <p:cNvPr id="3" name="TextBox 2"/>
+          <p:cNvSpPr txBox="1"/>
+          <p:nvPr/>
+        </p:nvSpPr>
+        <p:spPr>
+          <a:xfrm>
+            <a:off x="868680" y="365760"/>
+            <a:ext cx="10820095" cy="777240"/>
+          </a:xfrm>
+          <a:prstGeom prst="rect">
+            <a:avLst/>
+          </a:prstGeom>
+          <a:noFill/>
+        </p:spPr>
+        <p:txBody>
+          <a:bodyPr wrap="square" anchor="ctr">
+            <a:spAutoFit/>
+          </a:bodyPr>
+          <a:lstStyle/>
+          <a:p>
+            <a:pPr algn="l"/>
+            <a:r>
+              <a:rPr sz="2800" b="1">
+                <a:solidFill>
+                  <a:srgbClr val="0B2E6F"/>
+                </a:solidFill>
+                <a:latin typeface="Calibri"/>
               </a:rPr>
               <a:t>Code: One repo, two backends</a:t>
             </a:r>
@@ -5226,82 +6961,287 @@
       </p:sp>
       <p:sp>
         <p:nvSpPr>
-          <p:cNvPr id="3" name="Content Placeholder 2"/>
-          <p:cNvSpPr>
-            <a:spLocks noGrp="1"/>
-          </p:cNvSpPr>
-          <p:nvPr>
-            <p:ph idx="1"/>
-          </p:nvPr>
-        </p:nvSpPr>
-        <p:spPr/>
-        <p:txBody>
-          <a:bodyPr wrap="square"/>
-          <a:lstStyle/>
-          <a:p>
-            <a:pPr lvl="1"/>
-            <a:r>
-              <a:rPr sz="1400">
-                <a:solidFill>
-                  <a:srgbClr val="222222"/>
-                </a:solidFill>
+          <p:cNvPr id="4" name="Rectangle 3"/>
+          <p:cNvSpPr/>
+          <p:nvPr/>
+        </p:nvSpPr>
+        <p:spPr>
+          <a:xfrm>
+            <a:off x="868680" y="1188720"/>
+            <a:ext cx="1097280" cy="38100"/>
+          </a:xfrm>
+          <a:prstGeom prst="rect">
+            <a:avLst/>
+          </a:prstGeom>
+          <a:solidFill>
+            <a:srgbClr val="109BC4"/>
+          </a:solidFill>
+          <a:ln>
+            <a:noFill/>
+          </a:ln>
+          <a:effectLst/>
+        </p:spPr>
+        <p:style>
+          <a:lnRef idx="1">
+            <a:schemeClr val="accent1"/>
+          </a:lnRef>
+          <a:fillRef idx="3">
+            <a:schemeClr val="accent1"/>
+          </a:fillRef>
+          <a:effectRef idx="2">
+            <a:schemeClr val="accent1"/>
+          </a:effectRef>
+          <a:fontRef idx="minor">
+            <a:schemeClr val="lt1"/>
+          </a:fontRef>
+        </p:style>
+        <p:txBody>
+          <a:bodyPr rtlCol="0" anchor="ctr"/>
+          <a:lstStyle/>
+          <a:p>
+            <a:pPr algn="ctr"/>
+          </a:p>
+        </p:txBody>
+      </p:sp>
+      <p:sp>
+        <p:nvSpPr>
+          <p:cNvPr id="5" name="TextBox 4"/>
+          <p:cNvSpPr txBox="1"/>
+          <p:nvPr/>
+        </p:nvSpPr>
+        <p:spPr>
+          <a:xfrm>
+            <a:off x="502920" y="1417320"/>
+            <a:ext cx="11185855" cy="2926080"/>
+          </a:xfrm>
+          <a:prstGeom prst="rect">
+            <a:avLst/>
+          </a:prstGeom>
+          <a:noFill/>
+        </p:spPr>
+        <p:txBody>
+          <a:bodyPr wrap="square" lIns="0" tIns="0">
+            <a:spAutoFit/>
+          </a:bodyPr>
+          <a:lstStyle/>
+          <a:p>
+            <a:pPr algn="l">
+              <a:spcAft>
+                <a:spcPts val="400"/>
+              </a:spcAft>
+            </a:pPr>
+            <a:r>
+              <a:rPr sz="1800" b="1">
+                <a:solidFill>
+                  <a:srgbClr val="109BC4"/>
+                </a:solidFill>
+                <a:latin typeface="Calibri"/>
+              </a:rPr>
+              <a:t>▸  </a:t>
+            </a:r>
+            <a:r>
+              <a:rPr sz="1700">
+                <a:solidFill>
+                  <a:srgbClr val="1A1A1A"/>
+                </a:solidFill>
+                <a:latin typeface="Calibri"/>
               </a:rPr>
               <a:t>Same FastAPI codebase runs Phase 1 (laptop) and Phase 2 (AWS).</a:t>
             </a:r>
           </a:p>
           <a:p>
-            <a:pPr lvl="1"/>
-            <a:r>
-              <a:rPr sz="1400">
-                <a:solidFill>
-                  <a:srgbClr val="222222"/>
-                </a:solidFill>
+            <a:pPr algn="l">
+              <a:spcAft>
+                <a:spcPts val="400"/>
+              </a:spcAft>
+            </a:pPr>
+            <a:r>
+              <a:rPr sz="1800" b="1">
+                <a:solidFill>
+                  <a:srgbClr val="109BC4"/>
+                </a:solidFill>
+                <a:latin typeface="Calibri"/>
+              </a:rPr>
+              <a:t>▸  </a:t>
+            </a:r>
+            <a:r>
+              <a:rPr sz="1700">
+                <a:solidFill>
+                  <a:srgbClr val="1A1A1A"/>
+                </a:solidFill>
+                <a:latin typeface="Calibri"/>
               </a:rPr>
               <a:t>Pluggable layers selected by environment variables:</a:t>
             </a:r>
           </a:p>
           <a:p>
-            <a:pPr lvl="1"/>
-            <a:r>
-              <a:rPr sz="1400">
-                <a:solidFill>
-                  <a:srgbClr val="222222"/>
-                </a:solidFill>
+            <a:pPr algn="l">
+              <a:spcAft>
+                <a:spcPts val="400"/>
+              </a:spcAft>
+            </a:pPr>
+            <a:r>
+              <a:rPr sz="1800" b="1">
+                <a:solidFill>
+                  <a:srgbClr val="109BC4"/>
+                </a:solidFill>
+                <a:latin typeface="Calibri"/>
+              </a:rPr>
+              <a:t>▸  </a:t>
+            </a:r>
+            <a:r>
+              <a:rPr sz="1700">
+                <a:solidFill>
+                  <a:srgbClr val="1A1A1A"/>
+                </a:solidFill>
+                <a:latin typeface="Calibri"/>
               </a:rPr>
               <a:t>STORAGE_BACKEND=local | s3</a:t>
             </a:r>
           </a:p>
           <a:p>
-            <a:pPr lvl="1"/>
-            <a:r>
-              <a:rPr sz="1400">
-                <a:solidFill>
-                  <a:srgbClr val="222222"/>
-                </a:solidFill>
+            <a:pPr algn="l">
+              <a:spcAft>
+                <a:spcPts val="400"/>
+              </a:spcAft>
+            </a:pPr>
+            <a:r>
+              <a:rPr sz="1800" b="1">
+                <a:solidFill>
+                  <a:srgbClr val="109BC4"/>
+                </a:solidFill>
+                <a:latin typeface="Calibri"/>
+              </a:rPr>
+              <a:t>▸  </a:t>
+            </a:r>
+            <a:r>
+              <a:rPr sz="1700">
+                <a:solidFill>
+                  <a:srgbClr val="1A1A1A"/>
+                </a:solidFill>
+                <a:latin typeface="Calibri"/>
               </a:rPr>
               <a:t>DATABASE_URL=sqlite://… | postgresql+psycopg2://…</a:t>
             </a:r>
           </a:p>
           <a:p>
-            <a:pPr lvl="1"/>
-            <a:r>
-              <a:rPr sz="1400">
-                <a:solidFill>
-                  <a:srgbClr val="222222"/>
-                </a:solidFill>
+            <a:pPr algn="l">
+              <a:spcAft>
+                <a:spcPts val="400"/>
+              </a:spcAft>
+            </a:pPr>
+            <a:r>
+              <a:rPr sz="1800" b="1">
+                <a:solidFill>
+                  <a:srgbClr val="109BC4"/>
+                </a:solidFill>
+                <a:latin typeface="Calibri"/>
+              </a:rPr>
+              <a:t>▸  </a:t>
+            </a:r>
+            <a:r>
+              <a:rPr sz="1700">
+                <a:solidFill>
+                  <a:srgbClr val="1A1A1A"/>
+                </a:solidFill>
+                <a:latin typeface="Calibri"/>
               </a:rPr>
               <a:t>Storage abstraction: app/storage.py (Protocol + LocalStorage + S3Storage)</a:t>
             </a:r>
           </a:p>
           <a:p>
-            <a:pPr lvl="1"/>
-            <a:r>
-              <a:rPr sz="1400">
-                <a:solidFill>
-                  <a:srgbClr val="222222"/>
-                </a:solidFill>
+            <a:pPr algn="l">
+              <a:spcAft>
+                <a:spcPts val="400"/>
+              </a:spcAft>
+            </a:pPr>
+            <a:r>
+              <a:rPr sz="1800" b="1">
+                <a:solidFill>
+                  <a:srgbClr val="109BC4"/>
+                </a:solidFill>
+                <a:latin typeface="Calibri"/>
+              </a:rPr>
+              <a:t>▸  </a:t>
+            </a:r>
+            <a:r>
+              <a:rPr sz="1700">
+                <a:solidFill>
+                  <a:srgbClr val="1A1A1A"/>
+                </a:solidFill>
+                <a:latin typeface="Calibri"/>
               </a:rPr>
               <a:t>Lambda imports the same app/ tree — no code duplication.</a:t>
+            </a:r>
+          </a:p>
+        </p:txBody>
+      </p:sp>
+      <p:sp>
+        <p:nvSpPr>
+          <p:cNvPr id="6" name="TextBox 5"/>
+          <p:cNvSpPr txBox="1"/>
+          <p:nvPr/>
+        </p:nvSpPr>
+        <p:spPr>
+          <a:xfrm>
+            <a:off x="502920" y="6446520"/>
+            <a:ext cx="7315200" cy="274320"/>
+          </a:xfrm>
+          <a:prstGeom prst="rect">
+            <a:avLst/>
+          </a:prstGeom>
+          <a:noFill/>
+        </p:spPr>
+        <p:txBody>
+          <a:bodyPr wrap="square" lIns="0" rIns="0" tIns="0" bIns="0" anchor="t">
+            <a:spAutoFit/>
+          </a:bodyPr>
+          <a:lstStyle/>
+          <a:p>
+            <a:pPr algn="l"/>
+            <a:r>
+              <a:rPr sz="900" b="0">
+                <a:solidFill>
+                  <a:srgbClr val="555F6D"/>
+                </a:solidFill>
+                <a:latin typeface="Calibri"/>
+              </a:rPr>
+              <a:t>Cloud-Native Healthcare DMS  ·  BITS Pilani  ·  Group 23</a:t>
+            </a:r>
+          </a:p>
+        </p:txBody>
+      </p:sp>
+      <p:sp>
+        <p:nvSpPr>
+          <p:cNvPr id="7" name="TextBox 6"/>
+          <p:cNvSpPr txBox="1"/>
+          <p:nvPr/>
+        </p:nvSpPr>
+        <p:spPr>
+          <a:xfrm>
+            <a:off x="10515600" y="6446520"/>
+            <a:ext cx="1188720" cy="274320"/>
+          </a:xfrm>
+          <a:prstGeom prst="rect">
+            <a:avLst/>
+          </a:prstGeom>
+          <a:noFill/>
+        </p:spPr>
+        <p:txBody>
+          <a:bodyPr wrap="square" lIns="0" rIns="0" tIns="0" bIns="0" anchor="t">
+            <a:spAutoFit/>
+          </a:bodyPr>
+          <a:lstStyle/>
+          <a:p>
+            <a:pPr algn="r"/>
+            <a:r>
+              <a:rPr sz="900" b="0">
+                <a:solidFill>
+                  <a:srgbClr val="555F6D"/>
+                </a:solidFill>
+                <a:latin typeface="Calibri"/>
+              </a:rPr>
+              <a:t>4 / 14</a:t>
             </a:r>
           </a:p>
         </p:txBody>
@@ -5326,24 +7266,77 @@
       <p:grpSpPr/>
       <p:sp>
         <p:nvSpPr>
-          <p:cNvPr id="2" name="Title 1"/>
-          <p:cNvSpPr>
-            <a:spLocks noGrp="1"/>
-          </p:cNvSpPr>
-          <p:nvPr>
-            <p:ph type="title"/>
-          </p:nvPr>
-        </p:nvSpPr>
-        <p:spPr/>
-        <p:txBody>
-          <a:bodyPr/>
-          <a:lstStyle/>
-          <a:p>
-            <a:r>
-              <a:rPr b="1">
-                <a:solidFill>
-                  <a:srgbClr val="0B3D91"/>
-                </a:solidFill>
+          <p:cNvPr id="2" name="Rectangle 1"/>
+          <p:cNvSpPr/>
+          <p:nvPr/>
+        </p:nvSpPr>
+        <p:spPr>
+          <a:xfrm>
+            <a:off x="502920" y="365760"/>
+            <a:ext cx="164592" cy="777240"/>
+          </a:xfrm>
+          <a:prstGeom prst="rect">
+            <a:avLst/>
+          </a:prstGeom>
+          <a:solidFill>
+            <a:srgbClr val="109BC4"/>
+          </a:solidFill>
+          <a:ln>
+            <a:noFill/>
+          </a:ln>
+          <a:effectLst/>
+        </p:spPr>
+        <p:style>
+          <a:lnRef idx="1">
+            <a:schemeClr val="accent1"/>
+          </a:lnRef>
+          <a:fillRef idx="3">
+            <a:schemeClr val="accent1"/>
+          </a:fillRef>
+          <a:effectRef idx="2">
+            <a:schemeClr val="accent1"/>
+          </a:effectRef>
+          <a:fontRef idx="minor">
+            <a:schemeClr val="lt1"/>
+          </a:fontRef>
+        </p:style>
+        <p:txBody>
+          <a:bodyPr rtlCol="0" anchor="ctr"/>
+          <a:lstStyle/>
+          <a:p>
+            <a:pPr algn="ctr"/>
+          </a:p>
+        </p:txBody>
+      </p:sp>
+      <p:sp>
+        <p:nvSpPr>
+          <p:cNvPr id="3" name="TextBox 2"/>
+          <p:cNvSpPr txBox="1"/>
+          <p:nvPr/>
+        </p:nvSpPr>
+        <p:spPr>
+          <a:xfrm>
+            <a:off x="868680" y="365760"/>
+            <a:ext cx="10820095" cy="777240"/>
+          </a:xfrm>
+          <a:prstGeom prst="rect">
+            <a:avLst/>
+          </a:prstGeom>
+          <a:noFill/>
+        </p:spPr>
+        <p:txBody>
+          <a:bodyPr wrap="square" anchor="ctr">
+            <a:spAutoFit/>
+          </a:bodyPr>
+          <a:lstStyle/>
+          <a:p>
+            <a:pPr algn="l"/>
+            <a:r>
+              <a:rPr sz="2800" b="1">
+                <a:solidFill>
+                  <a:srgbClr val="0B2E6F"/>
+                </a:solidFill>
+                <a:latin typeface="Calibri"/>
               </a:rPr>
               <a:t>Infrastructure as Code (Terraform)</a:t>
             </a:r>
@@ -5352,71 +7345,294 @@
       </p:sp>
       <p:sp>
         <p:nvSpPr>
-          <p:cNvPr id="3" name="Content Placeholder 2"/>
-          <p:cNvSpPr>
-            <a:spLocks noGrp="1"/>
-          </p:cNvSpPr>
-          <p:nvPr>
-            <p:ph idx="1"/>
-          </p:nvPr>
-        </p:nvSpPr>
-        <p:spPr/>
-        <p:txBody>
-          <a:bodyPr wrap="square"/>
-          <a:lstStyle/>
-          <a:p>
-            <a:pPr lvl="1"/>
-            <a:r>
-              <a:rPr sz="1400">
-                <a:solidFill>
-                  <a:srgbClr val="222222"/>
-                </a:solidFill>
+          <p:cNvPr id="4" name="Rectangle 3"/>
+          <p:cNvSpPr/>
+          <p:nvPr/>
+        </p:nvSpPr>
+        <p:spPr>
+          <a:xfrm>
+            <a:off x="868680" y="1188720"/>
+            <a:ext cx="1097280" cy="38100"/>
+          </a:xfrm>
+          <a:prstGeom prst="rect">
+            <a:avLst/>
+          </a:prstGeom>
+          <a:solidFill>
+            <a:srgbClr val="109BC4"/>
+          </a:solidFill>
+          <a:ln>
+            <a:noFill/>
+          </a:ln>
+          <a:effectLst/>
+        </p:spPr>
+        <p:style>
+          <a:lnRef idx="1">
+            <a:schemeClr val="accent1"/>
+          </a:lnRef>
+          <a:fillRef idx="3">
+            <a:schemeClr val="accent1"/>
+          </a:fillRef>
+          <a:effectRef idx="2">
+            <a:schemeClr val="accent1"/>
+          </a:effectRef>
+          <a:fontRef idx="minor">
+            <a:schemeClr val="lt1"/>
+          </a:fontRef>
+        </p:style>
+        <p:txBody>
+          <a:bodyPr rtlCol="0" anchor="ctr"/>
+          <a:lstStyle/>
+          <a:p>
+            <a:pPr algn="ctr"/>
+          </a:p>
+        </p:txBody>
+      </p:sp>
+      <p:sp>
+        <p:nvSpPr>
+          <p:cNvPr id="5" name="TextBox 4"/>
+          <p:cNvSpPr txBox="1"/>
+          <p:nvPr/>
+        </p:nvSpPr>
+        <p:spPr>
+          <a:xfrm>
+            <a:off x="502920" y="1417320"/>
+            <a:ext cx="11185855" cy="1097280"/>
+          </a:xfrm>
+          <a:prstGeom prst="rect">
+            <a:avLst/>
+          </a:prstGeom>
+          <a:noFill/>
+        </p:spPr>
+        <p:txBody>
+          <a:bodyPr wrap="square" lIns="0" tIns="0">
+            <a:spAutoFit/>
+          </a:bodyPr>
+          <a:lstStyle/>
+          <a:p>
+            <a:pPr algn="l">
+              <a:spcAft>
+                <a:spcPts val="400"/>
+              </a:spcAft>
+            </a:pPr>
+            <a:r>
+              <a:rPr sz="1800" b="1">
+                <a:solidFill>
+                  <a:srgbClr val="109BC4"/>
+                </a:solidFill>
+                <a:latin typeface="Calibri"/>
+              </a:rPr>
+              <a:t>▸  </a:t>
+            </a:r>
+            <a:r>
+              <a:rPr sz="1700">
+                <a:solidFill>
+                  <a:srgbClr val="1A1A1A"/>
+                </a:solidFill>
+                <a:latin typeface="Calibri"/>
               </a:rPr>
               <a:t>10 .tf files, ~ 600 LOC, single terraform apply</a:t>
             </a:r>
           </a:p>
           <a:p>
-            <a:pPr lvl="1"/>
-            <a:r>
-              <a:rPr sz="1400">
-                <a:solidFill>
-                  <a:srgbClr val="222222"/>
-                </a:solidFill>
+            <a:pPr algn="l">
+              <a:spcAft>
+                <a:spcPts val="400"/>
+              </a:spcAft>
+            </a:pPr>
+            <a:r>
+              <a:rPr sz="1800" b="1">
+                <a:solidFill>
+                  <a:srgbClr val="109BC4"/>
+                </a:solidFill>
+                <a:latin typeface="Calibri"/>
+              </a:rPr>
+              <a:t>▸  </a:t>
+            </a:r>
+            <a:r>
+              <a:rPr sz="1700">
+                <a:solidFill>
+                  <a:srgbClr val="1A1A1A"/>
+                </a:solidFill>
+                <a:latin typeface="Calibri"/>
               </a:rPr>
               <a:t>Provisions: VPC + 2 AZs · KMS CMK · S3 + lifecycle · RDS Multi-AZ · ALB +</a:t>
             </a:r>
           </a:p>
-          <a:p>
-            <a:pPr/>
-            <a:r>
-              <a:rPr sz="1600">
-                <a:solidFill>
-                  <a:srgbClr val="222222"/>
-                </a:solidFill>
+        </p:txBody>
+      </p:sp>
+      <p:sp>
+        <p:nvSpPr>
+          <p:cNvPr id="6" name="TextBox 5"/>
+          <p:cNvSpPr txBox="1"/>
+          <p:nvPr/>
+        </p:nvSpPr>
+        <p:spPr>
+          <a:xfrm>
+            <a:off x="502920" y="2414015"/>
+            <a:ext cx="11185855" cy="548640"/>
+          </a:xfrm>
+          <a:prstGeom prst="rect">
+            <a:avLst/>
+          </a:prstGeom>
+          <a:noFill/>
+        </p:spPr>
+        <p:txBody>
+          <a:bodyPr wrap="square" tIns="0" bIns="0">
+            <a:spAutoFit/>
+          </a:bodyPr>
+          <a:lstStyle/>
+          <a:p>
+            <a:r>
+              <a:rPr sz="1800">
+                <a:solidFill>
+                  <a:srgbClr val="1A1A1A"/>
+                </a:solidFill>
+                <a:latin typeface="Calibri"/>
               </a:rPr>
               <a:t>ASG · Lambda + EventBridge + SNS · CloudTrail · CloudWatch alarms</a:t>
             </a:r>
           </a:p>
-          <a:p>
-            <a:pPr lvl="1"/>
-            <a:r>
-              <a:rPr sz="1400">
-                <a:solidFill>
-                  <a:srgbClr val="222222"/>
-                </a:solidFill>
+        </p:txBody>
+      </p:sp>
+      <p:sp>
+        <p:nvSpPr>
+          <p:cNvPr id="7" name="TextBox 6"/>
+          <p:cNvSpPr txBox="1"/>
+          <p:nvPr/>
+        </p:nvSpPr>
+        <p:spPr>
+          <a:xfrm>
+            <a:off x="502920" y="2916935"/>
+            <a:ext cx="11185855" cy="1097280"/>
+          </a:xfrm>
+          <a:prstGeom prst="rect">
+            <a:avLst/>
+          </a:prstGeom>
+          <a:noFill/>
+        </p:spPr>
+        <p:txBody>
+          <a:bodyPr wrap="square" lIns="0" tIns="0">
+            <a:spAutoFit/>
+          </a:bodyPr>
+          <a:lstStyle/>
+          <a:p>
+            <a:pPr algn="l">
+              <a:spcAft>
+                <a:spcPts val="400"/>
+              </a:spcAft>
+            </a:pPr>
+            <a:r>
+              <a:rPr sz="1800" b="1">
+                <a:solidFill>
+                  <a:srgbClr val="109BC4"/>
+                </a:solidFill>
+                <a:latin typeface="Calibri"/>
+              </a:rPr>
+              <a:t>▸  </a:t>
+            </a:r>
+            <a:r>
+              <a:rPr sz="1700">
+                <a:solidFill>
+                  <a:srgbClr val="1A1A1A"/>
+                </a:solidFill>
+                <a:latin typeface="Calibri"/>
               </a:rPr>
               <a:t>IMDSv2-only EC2; least-privilege IAM; private subnets for data layer.</a:t>
             </a:r>
           </a:p>
           <a:p>
-            <a:pPr lvl="1"/>
-            <a:r>
-              <a:rPr sz="1400">
-                <a:solidFill>
-                  <a:srgbClr val="222222"/>
-                </a:solidFill>
+            <a:pPr algn="l">
+              <a:spcAft>
+                <a:spcPts val="400"/>
+              </a:spcAft>
+            </a:pPr>
+            <a:r>
+              <a:rPr sz="1800" b="1">
+                <a:solidFill>
+                  <a:srgbClr val="109BC4"/>
+                </a:solidFill>
+                <a:latin typeface="Calibri"/>
+              </a:rPr>
+              <a:t>▸  </a:t>
+            </a:r>
+            <a:r>
+              <a:rPr sz="1700">
+                <a:solidFill>
+                  <a:srgbClr val="1A1A1A"/>
+                </a:solidFill>
+                <a:latin typeface="Calibri"/>
               </a:rPr>
               <a:t>terraform destroy returns the account to zero spend.</a:t>
+            </a:r>
+          </a:p>
+        </p:txBody>
+      </p:sp>
+      <p:sp>
+        <p:nvSpPr>
+          <p:cNvPr id="8" name="TextBox 7"/>
+          <p:cNvSpPr txBox="1"/>
+          <p:nvPr/>
+        </p:nvSpPr>
+        <p:spPr>
+          <a:xfrm>
+            <a:off x="502920" y="6446520"/>
+            <a:ext cx="7315200" cy="274320"/>
+          </a:xfrm>
+          <a:prstGeom prst="rect">
+            <a:avLst/>
+          </a:prstGeom>
+          <a:noFill/>
+        </p:spPr>
+        <p:txBody>
+          <a:bodyPr wrap="square" lIns="0" rIns="0" tIns="0" bIns="0" anchor="t">
+            <a:spAutoFit/>
+          </a:bodyPr>
+          <a:lstStyle/>
+          <a:p>
+            <a:pPr algn="l"/>
+            <a:r>
+              <a:rPr sz="900" b="0">
+                <a:solidFill>
+                  <a:srgbClr val="555F6D"/>
+                </a:solidFill>
+                <a:latin typeface="Calibri"/>
+              </a:rPr>
+              <a:t>Cloud-Native Healthcare DMS  ·  BITS Pilani  ·  Group 23</a:t>
+            </a:r>
+          </a:p>
+        </p:txBody>
+      </p:sp>
+      <p:sp>
+        <p:nvSpPr>
+          <p:cNvPr id="9" name="TextBox 8"/>
+          <p:cNvSpPr txBox="1"/>
+          <p:nvPr/>
+        </p:nvSpPr>
+        <p:spPr>
+          <a:xfrm>
+            <a:off x="10515600" y="6446520"/>
+            <a:ext cx="1188720" cy="274320"/>
+          </a:xfrm>
+          <a:prstGeom prst="rect">
+            <a:avLst/>
+          </a:prstGeom>
+          <a:noFill/>
+        </p:spPr>
+        <p:txBody>
+          <a:bodyPr wrap="square" lIns="0" rIns="0" tIns="0" bIns="0" anchor="t">
+            <a:spAutoFit/>
+          </a:bodyPr>
+          <a:lstStyle/>
+          <a:p>
+            <a:pPr algn="r"/>
+            <a:r>
+              <a:rPr sz="900" b="0">
+                <a:solidFill>
+                  <a:srgbClr val="555F6D"/>
+                </a:solidFill>
+                <a:latin typeface="Calibri"/>
+              </a:rPr>
+              <a:t>5 / 14</a:t>
             </a:r>
           </a:p>
         </p:txBody>
@@ -5441,24 +7657,77 @@
       <p:grpSpPr/>
       <p:sp>
         <p:nvSpPr>
-          <p:cNvPr id="2" name="Title 1"/>
-          <p:cNvSpPr>
-            <a:spLocks noGrp="1"/>
-          </p:cNvSpPr>
-          <p:nvPr>
-            <p:ph type="title"/>
-          </p:nvPr>
-        </p:nvSpPr>
-        <p:spPr/>
-        <p:txBody>
-          <a:bodyPr/>
-          <a:lstStyle/>
-          <a:p>
-            <a:r>
-              <a:rPr b="1">
-                <a:solidFill>
-                  <a:srgbClr val="0B3D91"/>
-                </a:solidFill>
+          <p:cNvPr id="2" name="Rectangle 1"/>
+          <p:cNvSpPr/>
+          <p:nvPr/>
+        </p:nvSpPr>
+        <p:spPr>
+          <a:xfrm>
+            <a:off x="502920" y="365760"/>
+            <a:ext cx="164592" cy="777240"/>
+          </a:xfrm>
+          <a:prstGeom prst="rect">
+            <a:avLst/>
+          </a:prstGeom>
+          <a:solidFill>
+            <a:srgbClr val="109BC4"/>
+          </a:solidFill>
+          <a:ln>
+            <a:noFill/>
+          </a:ln>
+          <a:effectLst/>
+        </p:spPr>
+        <p:style>
+          <a:lnRef idx="1">
+            <a:schemeClr val="accent1"/>
+          </a:lnRef>
+          <a:fillRef idx="3">
+            <a:schemeClr val="accent1"/>
+          </a:fillRef>
+          <a:effectRef idx="2">
+            <a:schemeClr val="accent1"/>
+          </a:effectRef>
+          <a:fontRef idx="minor">
+            <a:schemeClr val="lt1"/>
+          </a:fontRef>
+        </p:style>
+        <p:txBody>
+          <a:bodyPr rtlCol="0" anchor="ctr"/>
+          <a:lstStyle/>
+          <a:p>
+            <a:pPr algn="ctr"/>
+          </a:p>
+        </p:txBody>
+      </p:sp>
+      <p:sp>
+        <p:nvSpPr>
+          <p:cNvPr id="3" name="TextBox 2"/>
+          <p:cNvSpPr txBox="1"/>
+          <p:nvPr/>
+        </p:nvSpPr>
+        <p:spPr>
+          <a:xfrm>
+            <a:off x="868680" y="365760"/>
+            <a:ext cx="10820095" cy="777240"/>
+          </a:xfrm>
+          <a:prstGeom prst="rect">
+            <a:avLst/>
+          </a:prstGeom>
+          <a:noFill/>
+        </p:spPr>
+        <p:txBody>
+          <a:bodyPr wrap="square" anchor="ctr">
+            <a:spAutoFit/>
+          </a:bodyPr>
+          <a:lstStyle/>
+          <a:p>
+            <a:pPr algn="l"/>
+            <a:r>
+              <a:rPr sz="2800" b="1">
+                <a:solidFill>
+                  <a:srgbClr val="0B2E6F"/>
+                </a:solidFill>
+                <a:latin typeface="Calibri"/>
               </a:rPr>
               <a:t>Security &amp; Compliance (O3)</a:t>
             </a:r>
@@ -5467,93 +7736,476 @@
       </p:sp>
       <p:sp>
         <p:nvSpPr>
-          <p:cNvPr id="3" name="Content Placeholder 2"/>
-          <p:cNvSpPr>
-            <a:spLocks noGrp="1"/>
-          </p:cNvSpPr>
-          <p:nvPr>
-            <p:ph idx="1"/>
-          </p:nvPr>
-        </p:nvSpPr>
-        <p:spPr/>
-        <p:txBody>
-          <a:bodyPr wrap="square"/>
-          <a:lstStyle/>
-          <a:p>
-            <a:pPr/>
-            <a:r>
-              <a:rPr sz="1600">
-                <a:solidFill>
-                  <a:srgbClr val="222222"/>
-                </a:solidFill>
-              </a:rPr>
-              <a:t>Control — Implementation</a:t>
-            </a:r>
-          </a:p>
-          <a:p>
-            <a:pPr/>
-            <a:r>
-              <a:rPr sz="1600">
-                <a:solidFill>
-                  <a:srgbClr val="222222"/>
-                </a:solidFill>
-              </a:rPr>
-              <a:t>Encryption at rest — KMS CMK on RDS, SSE-KMS on S3, log groups, SNS, CloudTrail</a:t>
-            </a:r>
-          </a:p>
-          <a:p>
-            <a:pPr/>
-            <a:r>
-              <a:rPr sz="1600">
-                <a:solidFill>
-                  <a:srgbClr val="222222"/>
-                </a:solidFill>
-              </a:rPr>
-              <a:t>Encryption in transit — TLS terminated at ALB; SG-restricted ingress</a:t>
-            </a:r>
-          </a:p>
-          <a:p>
-            <a:pPr/>
-            <a:r>
-              <a:rPr sz="1600">
-                <a:solidFill>
-                  <a:srgbClr val="222222"/>
-                </a:solidFill>
-              </a:rPr>
-              <a:t>AuthN / AuthZ — App-level JWT + RBAC; cloud-level IAM least-privilege</a:t>
-            </a:r>
-          </a:p>
-          <a:p>
-            <a:pPr/>
-            <a:r>
-              <a:rPr sz="1600">
-                <a:solidFill>
-                  <a:srgbClr val="222222"/>
-                </a:solidFill>
-              </a:rPr>
-              <a:t>Audit — CloudTrail multi-region, log-file validation</a:t>
-            </a:r>
-          </a:p>
-          <a:p>
-            <a:pPr/>
-            <a:r>
-              <a:rPr sz="1600">
-                <a:solidFill>
-                  <a:srgbClr val="222222"/>
-                </a:solidFill>
-              </a:rPr>
-              <a:t>PHI retention — S3 lifecycle: IA → Glacier → expire @ 7 y</a:t>
-            </a:r>
-          </a:p>
-          <a:p>
-            <a:pPr/>
-            <a:r>
-              <a:rPr sz="1600">
-                <a:solidFill>
-                  <a:srgbClr val="222222"/>
-                </a:solidFill>
-              </a:rPr>
-              <a:t>Network isolation — Private subnets for EC2 + RDS; SGs least-privilege</a:t>
+          <p:cNvPr id="4" name="Rectangle 3"/>
+          <p:cNvSpPr/>
+          <p:nvPr/>
+        </p:nvSpPr>
+        <p:spPr>
+          <a:xfrm>
+            <a:off x="868680" y="1188720"/>
+            <a:ext cx="1097280" cy="38100"/>
+          </a:xfrm>
+          <a:prstGeom prst="rect">
+            <a:avLst/>
+          </a:prstGeom>
+          <a:solidFill>
+            <a:srgbClr val="109BC4"/>
+          </a:solidFill>
+          <a:ln>
+            <a:noFill/>
+          </a:ln>
+          <a:effectLst/>
+        </p:spPr>
+        <p:style>
+          <a:lnRef idx="1">
+            <a:schemeClr val="accent1"/>
+          </a:lnRef>
+          <a:fillRef idx="3">
+            <a:schemeClr val="accent1"/>
+          </a:fillRef>
+          <a:effectRef idx="2">
+            <a:schemeClr val="accent1"/>
+          </a:effectRef>
+          <a:fontRef idx="minor">
+            <a:schemeClr val="lt1"/>
+          </a:fontRef>
+        </p:style>
+        <p:txBody>
+          <a:bodyPr rtlCol="0" anchor="ctr"/>
+          <a:lstStyle/>
+          <a:p>
+            <a:pPr algn="ctr"/>
+          </a:p>
+        </p:txBody>
+      </p:sp>
+      <p:graphicFrame>
+        <p:nvGraphicFramePr>
+          <p:cNvPr id="5" name="Table 4"/>
+          <p:cNvGraphicFramePr>
+            <a:graphicFrameLocks noGrp="1"/>
+          </p:cNvGraphicFramePr>
+          <p:nvPr/>
+        </p:nvGraphicFramePr>
+        <p:xfrm>
+          <a:off x="502920" y="1417320"/>
+          <a:ext cx="11185855" cy="2560320"/>
+        </p:xfrm>
+        <a:graphic>
+          <a:graphicData uri="http://schemas.openxmlformats.org/drawingml/2006/table">
+            <a:tbl>
+              <a:tblPr firstRow="1" bandRow="1">
+                <a:tableStyleId>{5C22544A-7EE6-4342-B048-85BDC9FD1C3A}</a:tableStyleId>
+              </a:tblPr>
+              <a:tblGrid>
+                <a:gridCol w="3355756"/>
+                <a:gridCol w="7830099"/>
+              </a:tblGrid>
+              <a:tr h="365760">
+                <a:tc>
+                  <a:txBody>
+                    <a:bodyPr wrap="square"/>
+                    <a:lstStyle/>
+                    <a:p>
+                      <a:pPr algn="l"/>
+                      <a:r>
+                        <a:rPr sz="1200" b="1">
+                          <a:solidFill>
+                            <a:srgbClr val="FFFFFF"/>
+                          </a:solidFill>
+                          <a:latin typeface="Calibri"/>
+                        </a:rPr>
+                        <a:t>Control</a:t>
+                      </a:r>
+                    </a:p>
+                  </a:txBody>
+                  <a:tcPr marL="73152" marR="73152" marT="36576" marB="36576">
+                    <a:solidFill>
+                      <a:srgbClr val="0B2E6F"/>
+                    </a:solidFill>
+                  </a:tcPr>
+                </a:tc>
+                <a:tc>
+                  <a:txBody>
+                    <a:bodyPr wrap="square"/>
+                    <a:lstStyle/>
+                    <a:p>
+                      <a:pPr algn="l"/>
+                      <a:r>
+                        <a:rPr sz="1200" b="1">
+                          <a:solidFill>
+                            <a:srgbClr val="FFFFFF"/>
+                          </a:solidFill>
+                          <a:latin typeface="Calibri"/>
+                        </a:rPr>
+                        <a:t>Implementation</a:t>
+                      </a:r>
+                    </a:p>
+                  </a:txBody>
+                  <a:tcPr marL="73152" marR="73152" marT="36576" marB="36576">
+                    <a:solidFill>
+                      <a:srgbClr val="0B2E6F"/>
+                    </a:solidFill>
+                  </a:tcPr>
+                </a:tc>
+              </a:tr>
+              <a:tr h="365760">
+                <a:tc>
+                  <a:txBody>
+                    <a:bodyPr wrap="square"/>
+                    <a:lstStyle/>
+                    <a:p>
+                      <a:pPr algn="l"/>
+                      <a:r>
+                        <a:rPr sz="1200">
+                          <a:solidFill>
+                            <a:srgbClr val="1A1A1A"/>
+                          </a:solidFill>
+                          <a:latin typeface="Calibri"/>
+                        </a:rPr>
+                        <a:t>Encryption at rest</a:t>
+                      </a:r>
+                    </a:p>
+                  </a:txBody>
+                  <a:tcPr marL="73152" marR="73152" marT="36576" marB="36576">
+                    <a:solidFill>
+                      <a:srgbClr val="FFFFFF"/>
+                    </a:solidFill>
+                  </a:tcPr>
+                </a:tc>
+                <a:tc>
+                  <a:txBody>
+                    <a:bodyPr wrap="square"/>
+                    <a:lstStyle/>
+                    <a:p>
+                      <a:pPr algn="l"/>
+                      <a:r>
+                        <a:rPr sz="1200">
+                          <a:solidFill>
+                            <a:srgbClr val="1A1A1A"/>
+                          </a:solidFill>
+                          <a:latin typeface="Calibri"/>
+                        </a:rPr>
+                        <a:t>KMS CMK on RDS, SSE-KMS on S3, log groups, SNS, CloudTrail</a:t>
+                      </a:r>
+                    </a:p>
+                  </a:txBody>
+                  <a:tcPr marL="73152" marR="73152" marT="36576" marB="36576">
+                    <a:solidFill>
+                      <a:srgbClr val="FFFFFF"/>
+                    </a:solidFill>
+                  </a:tcPr>
+                </a:tc>
+              </a:tr>
+              <a:tr h="365760">
+                <a:tc>
+                  <a:txBody>
+                    <a:bodyPr wrap="square"/>
+                    <a:lstStyle/>
+                    <a:p>
+                      <a:pPr algn="l"/>
+                      <a:r>
+                        <a:rPr sz="1200">
+                          <a:solidFill>
+                            <a:srgbClr val="1A1A1A"/>
+                          </a:solidFill>
+                          <a:latin typeface="Calibri"/>
+                        </a:rPr>
+                        <a:t>Encryption in transit</a:t>
+                      </a:r>
+                    </a:p>
+                  </a:txBody>
+                  <a:tcPr marL="73152" marR="73152" marT="36576" marB="36576">
+                    <a:solidFill>
+                      <a:srgbClr val="EEF2F9"/>
+                    </a:solidFill>
+                  </a:tcPr>
+                </a:tc>
+                <a:tc>
+                  <a:txBody>
+                    <a:bodyPr wrap="square"/>
+                    <a:lstStyle/>
+                    <a:p>
+                      <a:pPr algn="l"/>
+                      <a:r>
+                        <a:rPr sz="1200">
+                          <a:solidFill>
+                            <a:srgbClr val="1A1A1A"/>
+                          </a:solidFill>
+                          <a:latin typeface="Calibri"/>
+                        </a:rPr>
+                        <a:t>TLS terminated at ALB; SG-restricted ingress</a:t>
+                      </a:r>
+                    </a:p>
+                  </a:txBody>
+                  <a:tcPr marL="73152" marR="73152" marT="36576" marB="36576">
+                    <a:solidFill>
+                      <a:srgbClr val="EEF2F9"/>
+                    </a:solidFill>
+                  </a:tcPr>
+                </a:tc>
+              </a:tr>
+              <a:tr h="365760">
+                <a:tc>
+                  <a:txBody>
+                    <a:bodyPr wrap="square"/>
+                    <a:lstStyle/>
+                    <a:p>
+                      <a:pPr algn="l"/>
+                      <a:r>
+                        <a:rPr sz="1200">
+                          <a:solidFill>
+                            <a:srgbClr val="1A1A1A"/>
+                          </a:solidFill>
+                          <a:latin typeface="Calibri"/>
+                        </a:rPr>
+                        <a:t>AuthN / AuthZ</a:t>
+                      </a:r>
+                    </a:p>
+                  </a:txBody>
+                  <a:tcPr marL="73152" marR="73152" marT="36576" marB="36576">
+                    <a:solidFill>
+                      <a:srgbClr val="FFFFFF"/>
+                    </a:solidFill>
+                  </a:tcPr>
+                </a:tc>
+                <a:tc>
+                  <a:txBody>
+                    <a:bodyPr wrap="square"/>
+                    <a:lstStyle/>
+                    <a:p>
+                      <a:pPr algn="l"/>
+                      <a:r>
+                        <a:rPr sz="1200">
+                          <a:solidFill>
+                            <a:srgbClr val="1A1A1A"/>
+                          </a:solidFill>
+                          <a:latin typeface="Calibri"/>
+                        </a:rPr>
+                        <a:t>App-level JWT + RBAC; cloud-level IAM least-privilege</a:t>
+                      </a:r>
+                    </a:p>
+                  </a:txBody>
+                  <a:tcPr marL="73152" marR="73152" marT="36576" marB="36576">
+                    <a:solidFill>
+                      <a:srgbClr val="FFFFFF"/>
+                    </a:solidFill>
+                  </a:tcPr>
+                </a:tc>
+              </a:tr>
+              <a:tr h="365760">
+                <a:tc>
+                  <a:txBody>
+                    <a:bodyPr wrap="square"/>
+                    <a:lstStyle/>
+                    <a:p>
+                      <a:pPr algn="l"/>
+                      <a:r>
+                        <a:rPr sz="1200">
+                          <a:solidFill>
+                            <a:srgbClr val="1A1A1A"/>
+                          </a:solidFill>
+                          <a:latin typeface="Calibri"/>
+                        </a:rPr>
+                        <a:t>Audit</a:t>
+                      </a:r>
+                    </a:p>
+                  </a:txBody>
+                  <a:tcPr marL="73152" marR="73152" marT="36576" marB="36576">
+                    <a:solidFill>
+                      <a:srgbClr val="EEF2F9"/>
+                    </a:solidFill>
+                  </a:tcPr>
+                </a:tc>
+                <a:tc>
+                  <a:txBody>
+                    <a:bodyPr wrap="square"/>
+                    <a:lstStyle/>
+                    <a:p>
+                      <a:pPr algn="l"/>
+                      <a:r>
+                        <a:rPr sz="1200">
+                          <a:solidFill>
+                            <a:srgbClr val="1A1A1A"/>
+                          </a:solidFill>
+                          <a:latin typeface="Calibri"/>
+                        </a:rPr>
+                        <a:t>CloudTrail multi-region, log-file validation</a:t>
+                      </a:r>
+                    </a:p>
+                  </a:txBody>
+                  <a:tcPr marL="73152" marR="73152" marT="36576" marB="36576">
+                    <a:solidFill>
+                      <a:srgbClr val="EEF2F9"/>
+                    </a:solidFill>
+                  </a:tcPr>
+                </a:tc>
+              </a:tr>
+              <a:tr h="365760">
+                <a:tc>
+                  <a:txBody>
+                    <a:bodyPr wrap="square"/>
+                    <a:lstStyle/>
+                    <a:p>
+                      <a:pPr algn="l"/>
+                      <a:r>
+                        <a:rPr sz="1200">
+                          <a:solidFill>
+                            <a:srgbClr val="1A1A1A"/>
+                          </a:solidFill>
+                          <a:latin typeface="Calibri"/>
+                        </a:rPr>
+                        <a:t>PHI retention</a:t>
+                      </a:r>
+                    </a:p>
+                  </a:txBody>
+                  <a:tcPr marL="73152" marR="73152" marT="36576" marB="36576">
+                    <a:solidFill>
+                      <a:srgbClr val="FFFFFF"/>
+                    </a:solidFill>
+                  </a:tcPr>
+                </a:tc>
+                <a:tc>
+                  <a:txBody>
+                    <a:bodyPr wrap="square"/>
+                    <a:lstStyle/>
+                    <a:p>
+                      <a:pPr algn="l"/>
+                      <a:r>
+                        <a:rPr sz="1200">
+                          <a:solidFill>
+                            <a:srgbClr val="1A1A1A"/>
+                          </a:solidFill>
+                          <a:latin typeface="Calibri"/>
+                        </a:rPr>
+                        <a:t>S3 lifecycle: IA → Glacier → expire @ 7 y</a:t>
+                      </a:r>
+                    </a:p>
+                  </a:txBody>
+                  <a:tcPr marL="73152" marR="73152" marT="36576" marB="36576">
+                    <a:solidFill>
+                      <a:srgbClr val="FFFFFF"/>
+                    </a:solidFill>
+                  </a:tcPr>
+                </a:tc>
+              </a:tr>
+              <a:tr h="365760">
+                <a:tc>
+                  <a:txBody>
+                    <a:bodyPr wrap="square"/>
+                    <a:lstStyle/>
+                    <a:p>
+                      <a:pPr algn="l"/>
+                      <a:r>
+                        <a:rPr sz="1200">
+                          <a:solidFill>
+                            <a:srgbClr val="1A1A1A"/>
+                          </a:solidFill>
+                          <a:latin typeface="Calibri"/>
+                        </a:rPr>
+                        <a:t>Network isolation</a:t>
+                      </a:r>
+                    </a:p>
+                  </a:txBody>
+                  <a:tcPr marL="73152" marR="73152" marT="36576" marB="36576">
+                    <a:solidFill>
+                      <a:srgbClr val="EEF2F9"/>
+                    </a:solidFill>
+                  </a:tcPr>
+                </a:tc>
+                <a:tc>
+                  <a:txBody>
+                    <a:bodyPr wrap="square"/>
+                    <a:lstStyle/>
+                    <a:p>
+                      <a:pPr algn="l"/>
+                      <a:r>
+                        <a:rPr sz="1200">
+                          <a:solidFill>
+                            <a:srgbClr val="1A1A1A"/>
+                          </a:solidFill>
+                          <a:latin typeface="Calibri"/>
+                        </a:rPr>
+                        <a:t>Private subnets for EC2 + RDS; SGs least-privilege</a:t>
+                      </a:r>
+                    </a:p>
+                  </a:txBody>
+                  <a:tcPr marL="73152" marR="73152" marT="36576" marB="36576">
+                    <a:solidFill>
+                      <a:srgbClr val="EEF2F9"/>
+                    </a:solidFill>
+                  </a:tcPr>
+                </a:tc>
+              </a:tr>
+            </a:tbl>
+          </a:graphicData>
+        </a:graphic>
+      </p:graphicFrame>
+      <p:sp>
+        <p:nvSpPr>
+          <p:cNvPr id="6" name="TextBox 5"/>
+          <p:cNvSpPr txBox="1"/>
+          <p:nvPr/>
+        </p:nvSpPr>
+        <p:spPr>
+          <a:xfrm>
+            <a:off x="502920" y="6446520"/>
+            <a:ext cx="7315200" cy="274320"/>
+          </a:xfrm>
+          <a:prstGeom prst="rect">
+            <a:avLst/>
+          </a:prstGeom>
+          <a:noFill/>
+        </p:spPr>
+        <p:txBody>
+          <a:bodyPr wrap="square" lIns="0" rIns="0" tIns="0" bIns="0" anchor="t">
+            <a:spAutoFit/>
+          </a:bodyPr>
+          <a:lstStyle/>
+          <a:p>
+            <a:pPr algn="l"/>
+            <a:r>
+              <a:rPr sz="900" b="0">
+                <a:solidFill>
+                  <a:srgbClr val="555F6D"/>
+                </a:solidFill>
+                <a:latin typeface="Calibri"/>
+              </a:rPr>
+              <a:t>Cloud-Native Healthcare DMS  ·  BITS Pilani  ·  Group 23</a:t>
+            </a:r>
+          </a:p>
+        </p:txBody>
+      </p:sp>
+      <p:sp>
+        <p:nvSpPr>
+          <p:cNvPr id="7" name="TextBox 6"/>
+          <p:cNvSpPr txBox="1"/>
+          <p:nvPr/>
+        </p:nvSpPr>
+        <p:spPr>
+          <a:xfrm>
+            <a:off x="10515600" y="6446520"/>
+            <a:ext cx="1188720" cy="274320"/>
+          </a:xfrm>
+          <a:prstGeom prst="rect">
+            <a:avLst/>
+          </a:prstGeom>
+          <a:noFill/>
+        </p:spPr>
+        <p:txBody>
+          <a:bodyPr wrap="square" lIns="0" rIns="0" tIns="0" bIns="0" anchor="t">
+            <a:spAutoFit/>
+          </a:bodyPr>
+          <a:lstStyle/>
+          <a:p>
+            <a:pPr algn="r"/>
+            <a:r>
+              <a:rPr sz="900" b="0">
+                <a:solidFill>
+                  <a:srgbClr val="555F6D"/>
+                </a:solidFill>
+                <a:latin typeface="Calibri"/>
+              </a:rPr>
+              <a:t>6 / 14</a:t>
             </a:r>
           </a:p>
         </p:txBody>
@@ -5578,24 +8230,77 @@
       <p:grpSpPr/>
       <p:sp>
         <p:nvSpPr>
-          <p:cNvPr id="2" name="Title 1"/>
-          <p:cNvSpPr>
-            <a:spLocks noGrp="1"/>
-          </p:cNvSpPr>
-          <p:nvPr>
-            <p:ph type="title"/>
-          </p:nvPr>
-        </p:nvSpPr>
-        <p:spPr/>
-        <p:txBody>
-          <a:bodyPr/>
-          <a:lstStyle/>
-          <a:p>
-            <a:r>
-              <a:rPr b="1">
-                <a:solidFill>
-                  <a:srgbClr val="0B3D91"/>
-                </a:solidFill>
+          <p:cNvPr id="2" name="Rectangle 1"/>
+          <p:cNvSpPr/>
+          <p:nvPr/>
+        </p:nvSpPr>
+        <p:spPr>
+          <a:xfrm>
+            <a:off x="502920" y="365760"/>
+            <a:ext cx="164592" cy="777240"/>
+          </a:xfrm>
+          <a:prstGeom prst="rect">
+            <a:avLst/>
+          </a:prstGeom>
+          <a:solidFill>
+            <a:srgbClr val="109BC4"/>
+          </a:solidFill>
+          <a:ln>
+            <a:noFill/>
+          </a:ln>
+          <a:effectLst/>
+        </p:spPr>
+        <p:style>
+          <a:lnRef idx="1">
+            <a:schemeClr val="accent1"/>
+          </a:lnRef>
+          <a:fillRef idx="3">
+            <a:schemeClr val="accent1"/>
+          </a:fillRef>
+          <a:effectRef idx="2">
+            <a:schemeClr val="accent1"/>
+          </a:effectRef>
+          <a:fontRef idx="minor">
+            <a:schemeClr val="lt1"/>
+          </a:fontRef>
+        </p:style>
+        <p:txBody>
+          <a:bodyPr rtlCol="0" anchor="ctr"/>
+          <a:lstStyle/>
+          <a:p>
+            <a:pPr algn="ctr"/>
+          </a:p>
+        </p:txBody>
+      </p:sp>
+      <p:sp>
+        <p:nvSpPr>
+          <p:cNvPr id="3" name="TextBox 2"/>
+          <p:cNvSpPr txBox="1"/>
+          <p:nvPr/>
+        </p:nvSpPr>
+        <p:spPr>
+          <a:xfrm>
+            <a:off x="868680" y="365760"/>
+            <a:ext cx="10820095" cy="777240"/>
+          </a:xfrm>
+          <a:prstGeom prst="rect">
+            <a:avLst/>
+          </a:prstGeom>
+          <a:noFill/>
+        </p:spPr>
+        <p:txBody>
+          <a:bodyPr wrap="square" anchor="ctr">
+            <a:spAutoFit/>
+          </a:bodyPr>
+          <a:lstStyle/>
+          <a:p>
+            <a:pPr algn="l"/>
+            <a:r>
+              <a:rPr sz="2800" b="1">
+                <a:solidFill>
+                  <a:srgbClr val="0B2E6F"/>
+                </a:solidFill>
+                <a:latin typeface="Calibri"/>
               </a:rPr>
               <a:t>Auto-Scaling &amp; Availability (O1, O6)</a:t>
             </a:r>
@@ -5604,71 +8309,262 @@
       </p:sp>
       <p:sp>
         <p:nvSpPr>
-          <p:cNvPr id="3" name="Content Placeholder 2"/>
-          <p:cNvSpPr>
-            <a:spLocks noGrp="1"/>
-          </p:cNvSpPr>
-          <p:nvPr>
-            <p:ph idx="1"/>
-          </p:nvPr>
-        </p:nvSpPr>
-        <p:spPr/>
-        <p:txBody>
-          <a:bodyPr wrap="square"/>
-          <a:lstStyle/>
-          <a:p>
-            <a:pPr lvl="1"/>
-            <a:r>
-              <a:rPr sz="1400">
-                <a:solidFill>
-                  <a:srgbClr val="222222"/>
-                </a:solidFill>
+          <p:cNvPr id="4" name="Rectangle 3"/>
+          <p:cNvSpPr/>
+          <p:nvPr/>
+        </p:nvSpPr>
+        <p:spPr>
+          <a:xfrm>
+            <a:off x="868680" y="1188720"/>
+            <a:ext cx="1097280" cy="38100"/>
+          </a:xfrm>
+          <a:prstGeom prst="rect">
+            <a:avLst/>
+          </a:prstGeom>
+          <a:solidFill>
+            <a:srgbClr val="109BC4"/>
+          </a:solidFill>
+          <a:ln>
+            <a:noFill/>
+          </a:ln>
+          <a:effectLst/>
+        </p:spPr>
+        <p:style>
+          <a:lnRef idx="1">
+            <a:schemeClr val="accent1"/>
+          </a:lnRef>
+          <a:fillRef idx="3">
+            <a:schemeClr val="accent1"/>
+          </a:fillRef>
+          <a:effectRef idx="2">
+            <a:schemeClr val="accent1"/>
+          </a:effectRef>
+          <a:fontRef idx="minor">
+            <a:schemeClr val="lt1"/>
+          </a:fontRef>
+        </p:style>
+        <p:txBody>
+          <a:bodyPr rtlCol="0" anchor="ctr"/>
+          <a:lstStyle/>
+          <a:p>
+            <a:pPr algn="ctr"/>
+          </a:p>
+        </p:txBody>
+      </p:sp>
+      <p:sp>
+        <p:nvSpPr>
+          <p:cNvPr id="5" name="TextBox 4"/>
+          <p:cNvSpPr txBox="1"/>
+          <p:nvPr/>
+        </p:nvSpPr>
+        <p:spPr>
+          <a:xfrm>
+            <a:off x="502920" y="1417320"/>
+            <a:ext cx="11185855" cy="2468880"/>
+          </a:xfrm>
+          <a:prstGeom prst="rect">
+            <a:avLst/>
+          </a:prstGeom>
+          <a:noFill/>
+        </p:spPr>
+        <p:txBody>
+          <a:bodyPr wrap="square" lIns="0" tIns="0">
+            <a:spAutoFit/>
+          </a:bodyPr>
+          <a:lstStyle/>
+          <a:p>
+            <a:pPr algn="l">
+              <a:spcAft>
+                <a:spcPts val="400"/>
+              </a:spcAft>
+            </a:pPr>
+            <a:r>
+              <a:rPr sz="1800" b="1">
+                <a:solidFill>
+                  <a:srgbClr val="109BC4"/>
+                </a:solidFill>
+                <a:latin typeface="Calibri"/>
+              </a:rPr>
+              <a:t>▸  </a:t>
+            </a:r>
+            <a:r>
+              <a:rPr sz="1700">
+                <a:solidFill>
+                  <a:srgbClr val="1A1A1A"/>
+                </a:solidFill>
+                <a:latin typeface="Calibri"/>
               </a:rPr>
               <a:t>ASG: min 1, max 3, TargetTracking on avg CPU = 60 %</a:t>
             </a:r>
           </a:p>
           <a:p>
-            <a:pPr lvl="1"/>
-            <a:r>
-              <a:rPr sz="1400">
-                <a:solidFill>
-                  <a:srgbClr val="222222"/>
-                </a:solidFill>
+            <a:pPr algn="l">
+              <a:spcAft>
+                <a:spcPts val="400"/>
+              </a:spcAft>
+            </a:pPr>
+            <a:r>
+              <a:rPr sz="1800" b="1">
+                <a:solidFill>
+                  <a:srgbClr val="109BC4"/>
+                </a:solidFill>
+                <a:latin typeface="Calibri"/>
+              </a:rPr>
+              <a:t>▸  </a:t>
+            </a:r>
+            <a:r>
+              <a:rPr sz="1700">
+                <a:solidFill>
+                  <a:srgbClr val="1A1A1A"/>
+                </a:solidFill>
+                <a:latin typeface="Calibri"/>
               </a:rPr>
               <a:t>ALB health check GET / every 30 s</a:t>
             </a:r>
           </a:p>
           <a:p>
-            <a:pPr lvl="1"/>
-            <a:r>
-              <a:rPr sz="1400">
-                <a:solidFill>
-                  <a:srgbClr val="222222"/>
-                </a:solidFill>
+            <a:pPr algn="l">
+              <a:spcAft>
+                <a:spcPts val="400"/>
+              </a:spcAft>
+            </a:pPr>
+            <a:r>
+              <a:rPr sz="1800" b="1">
+                <a:solidFill>
+                  <a:srgbClr val="109BC4"/>
+                </a:solidFill>
+                <a:latin typeface="Calibri"/>
+              </a:rPr>
+              <a:t>▸  </a:t>
+            </a:r>
+            <a:r>
+              <a:rPr sz="1700">
+                <a:solidFill>
+                  <a:srgbClr val="1A1A1A"/>
+                </a:solidFill>
+                <a:latin typeface="Calibri"/>
               </a:rPr>
               <a:t>RDS Multi-AZ → automated failover, &lt; 60 s RTO</a:t>
             </a:r>
           </a:p>
           <a:p>
-            <a:pPr lvl="1"/>
-            <a:r>
-              <a:rPr sz="1400">
-                <a:solidFill>
-                  <a:srgbClr val="222222"/>
-                </a:solidFill>
+            <a:pPr algn="l">
+              <a:spcAft>
+                <a:spcPts val="400"/>
+              </a:spcAft>
+            </a:pPr>
+            <a:r>
+              <a:rPr sz="1800" b="1">
+                <a:solidFill>
+                  <a:srgbClr val="109BC4"/>
+                </a:solidFill>
+                <a:latin typeface="Calibri"/>
+              </a:rPr>
+              <a:t>▸  </a:t>
+            </a:r>
+            <a:r>
+              <a:rPr sz="1700">
+                <a:solidFill>
+                  <a:srgbClr val="1A1A1A"/>
+                </a:solidFill>
+                <a:latin typeface="Calibri"/>
               </a:rPr>
               <a:t>2 CloudWatch alarms (5xx &gt; 5/min, CPU &gt; 80 % for 3 min) → SNS</a:t>
             </a:r>
           </a:p>
           <a:p>
-            <a:pPr lvl="1"/>
-            <a:r>
-              <a:rPr sz="1400">
-                <a:solidFill>
-                  <a:srgbClr val="222222"/>
-                </a:solidFill>
+            <a:pPr algn="l">
+              <a:spcAft>
+                <a:spcPts val="400"/>
+              </a:spcAft>
+            </a:pPr>
+            <a:r>
+              <a:rPr sz="1800" b="1">
+                <a:solidFill>
+                  <a:srgbClr val="109BC4"/>
+                </a:solidFill>
+                <a:latin typeface="Calibri"/>
+              </a:rPr>
+              <a:t>▸  </a:t>
+            </a:r>
+            <a:r>
+              <a:rPr sz="1700">
+                <a:solidFill>
+                  <a:srgbClr val="1A1A1A"/>
+                </a:solidFill>
+                <a:latin typeface="Calibri"/>
               </a:rPr>
               <a:t>Demonstrated by ab / wrk load test in the recording</a:t>
+            </a:r>
+          </a:p>
+        </p:txBody>
+      </p:sp>
+      <p:sp>
+        <p:nvSpPr>
+          <p:cNvPr id="6" name="TextBox 5"/>
+          <p:cNvSpPr txBox="1"/>
+          <p:nvPr/>
+        </p:nvSpPr>
+        <p:spPr>
+          <a:xfrm>
+            <a:off x="502920" y="6446520"/>
+            <a:ext cx="7315200" cy="274320"/>
+          </a:xfrm>
+          <a:prstGeom prst="rect">
+            <a:avLst/>
+          </a:prstGeom>
+          <a:noFill/>
+        </p:spPr>
+        <p:txBody>
+          <a:bodyPr wrap="square" lIns="0" rIns="0" tIns="0" bIns="0" anchor="t">
+            <a:spAutoFit/>
+          </a:bodyPr>
+          <a:lstStyle/>
+          <a:p>
+            <a:pPr algn="l"/>
+            <a:r>
+              <a:rPr sz="900" b="0">
+                <a:solidFill>
+                  <a:srgbClr val="555F6D"/>
+                </a:solidFill>
+                <a:latin typeface="Calibri"/>
+              </a:rPr>
+              <a:t>Cloud-Native Healthcare DMS  ·  BITS Pilani  ·  Group 23</a:t>
+            </a:r>
+          </a:p>
+        </p:txBody>
+      </p:sp>
+      <p:sp>
+        <p:nvSpPr>
+          <p:cNvPr id="7" name="TextBox 6"/>
+          <p:cNvSpPr txBox="1"/>
+          <p:nvPr/>
+        </p:nvSpPr>
+        <p:spPr>
+          <a:xfrm>
+            <a:off x="10515600" y="6446520"/>
+            <a:ext cx="1188720" cy="274320"/>
+          </a:xfrm>
+          <a:prstGeom prst="rect">
+            <a:avLst/>
+          </a:prstGeom>
+          <a:noFill/>
+        </p:spPr>
+        <p:txBody>
+          <a:bodyPr wrap="square" lIns="0" rIns="0" tIns="0" bIns="0" anchor="t">
+            <a:spAutoFit/>
+          </a:bodyPr>
+          <a:lstStyle/>
+          <a:p>
+            <a:pPr algn="r"/>
+            <a:r>
+              <a:rPr sz="900" b="0">
+                <a:solidFill>
+                  <a:srgbClr val="555F6D"/>
+                </a:solidFill>
+                <a:latin typeface="Calibri"/>
+              </a:rPr>
+              <a:t>7 / 14</a:t>
             </a:r>
           </a:p>
         </p:txBody>
@@ -5693,24 +8589,77 @@
       <p:grpSpPr/>
       <p:sp>
         <p:nvSpPr>
-          <p:cNvPr id="2" name="Title 1"/>
-          <p:cNvSpPr>
-            <a:spLocks noGrp="1"/>
-          </p:cNvSpPr>
-          <p:nvPr>
-            <p:ph type="title"/>
-          </p:nvPr>
-        </p:nvSpPr>
-        <p:spPr/>
-        <p:txBody>
-          <a:bodyPr/>
-          <a:lstStyle/>
-          <a:p>
-            <a:r>
-              <a:rPr b="1">
-                <a:solidFill>
-                  <a:srgbClr val="0B3D91"/>
-                </a:solidFill>
+          <p:cNvPr id="2" name="Rectangle 1"/>
+          <p:cNvSpPr/>
+          <p:nvPr/>
+        </p:nvSpPr>
+        <p:spPr>
+          <a:xfrm>
+            <a:off x="502920" y="365760"/>
+            <a:ext cx="164592" cy="777240"/>
+          </a:xfrm>
+          <a:prstGeom prst="rect">
+            <a:avLst/>
+          </a:prstGeom>
+          <a:solidFill>
+            <a:srgbClr val="109BC4"/>
+          </a:solidFill>
+          <a:ln>
+            <a:noFill/>
+          </a:ln>
+          <a:effectLst/>
+        </p:spPr>
+        <p:style>
+          <a:lnRef idx="1">
+            <a:schemeClr val="accent1"/>
+          </a:lnRef>
+          <a:fillRef idx="3">
+            <a:schemeClr val="accent1"/>
+          </a:fillRef>
+          <a:effectRef idx="2">
+            <a:schemeClr val="accent1"/>
+          </a:effectRef>
+          <a:fontRef idx="minor">
+            <a:schemeClr val="lt1"/>
+          </a:fontRef>
+        </p:style>
+        <p:txBody>
+          <a:bodyPr rtlCol="0" anchor="ctr"/>
+          <a:lstStyle/>
+          <a:p>
+            <a:pPr algn="ctr"/>
+          </a:p>
+        </p:txBody>
+      </p:sp>
+      <p:sp>
+        <p:nvSpPr>
+          <p:cNvPr id="3" name="TextBox 2"/>
+          <p:cNvSpPr txBox="1"/>
+          <p:nvPr/>
+        </p:nvSpPr>
+        <p:spPr>
+          <a:xfrm>
+            <a:off x="868680" y="365760"/>
+            <a:ext cx="10820095" cy="777240"/>
+          </a:xfrm>
+          <a:prstGeom prst="rect">
+            <a:avLst/>
+          </a:prstGeom>
+          <a:noFill/>
+        </p:spPr>
+        <p:txBody>
+          <a:bodyPr wrap="square" anchor="ctr">
+            <a:spAutoFit/>
+          </a:bodyPr>
+          <a:lstStyle/>
+          <a:p>
+            <a:pPr algn="l"/>
+            <a:r>
+              <a:rPr sz="2800" b="1">
+                <a:solidFill>
+                  <a:srgbClr val="0B2E6F"/>
+                </a:solidFill>
+                <a:latin typeface="Calibri"/>
               </a:rPr>
               <a:t>Serverless Reminders (O4)</a:t>
             </a:r>
@@ -5719,71 +8668,262 @@
       </p:sp>
       <p:sp>
         <p:nvSpPr>
-          <p:cNvPr id="3" name="Content Placeholder 2"/>
-          <p:cNvSpPr>
-            <a:spLocks noGrp="1"/>
-          </p:cNvSpPr>
-          <p:nvPr>
-            <p:ph idx="1"/>
-          </p:nvPr>
-        </p:nvSpPr>
-        <p:spPr/>
-        <p:txBody>
-          <a:bodyPr wrap="square"/>
-          <a:lstStyle/>
-          <a:p>
-            <a:pPr lvl="1"/>
-            <a:r>
-              <a:rPr sz="1400">
-                <a:solidFill>
-                  <a:srgbClr val="222222"/>
-                </a:solidFill>
+          <p:cNvPr id="4" name="Rectangle 3"/>
+          <p:cNvSpPr/>
+          <p:nvPr/>
+        </p:nvSpPr>
+        <p:spPr>
+          <a:xfrm>
+            <a:off x="868680" y="1188720"/>
+            <a:ext cx="1097280" cy="38100"/>
+          </a:xfrm>
+          <a:prstGeom prst="rect">
+            <a:avLst/>
+          </a:prstGeom>
+          <a:solidFill>
+            <a:srgbClr val="109BC4"/>
+          </a:solidFill>
+          <a:ln>
+            <a:noFill/>
+          </a:ln>
+          <a:effectLst/>
+        </p:spPr>
+        <p:style>
+          <a:lnRef idx="1">
+            <a:schemeClr val="accent1"/>
+          </a:lnRef>
+          <a:fillRef idx="3">
+            <a:schemeClr val="accent1"/>
+          </a:fillRef>
+          <a:effectRef idx="2">
+            <a:schemeClr val="accent1"/>
+          </a:effectRef>
+          <a:fontRef idx="minor">
+            <a:schemeClr val="lt1"/>
+          </a:fontRef>
+        </p:style>
+        <p:txBody>
+          <a:bodyPr rtlCol="0" anchor="ctr"/>
+          <a:lstStyle/>
+          <a:p>
+            <a:pPr algn="ctr"/>
+          </a:p>
+        </p:txBody>
+      </p:sp>
+      <p:sp>
+        <p:nvSpPr>
+          <p:cNvPr id="5" name="TextBox 4"/>
+          <p:cNvSpPr txBox="1"/>
+          <p:nvPr/>
+        </p:nvSpPr>
+        <p:spPr>
+          <a:xfrm>
+            <a:off x="502920" y="1417320"/>
+            <a:ext cx="11185855" cy="2468880"/>
+          </a:xfrm>
+          <a:prstGeom prst="rect">
+            <a:avLst/>
+          </a:prstGeom>
+          <a:noFill/>
+        </p:spPr>
+        <p:txBody>
+          <a:bodyPr wrap="square" lIns="0" tIns="0">
+            <a:spAutoFit/>
+          </a:bodyPr>
+          <a:lstStyle/>
+          <a:p>
+            <a:pPr algn="l">
+              <a:spcAft>
+                <a:spcPts val="400"/>
+              </a:spcAft>
+            </a:pPr>
+            <a:r>
+              <a:rPr sz="1800" b="1">
+                <a:solidFill>
+                  <a:srgbClr val="109BC4"/>
+                </a:solidFill>
+                <a:latin typeface="Calibri"/>
+              </a:rPr>
+              <a:t>▸  </a:t>
+            </a:r>
+            <a:r>
+              <a:rPr sz="1700">
+                <a:solidFill>
+                  <a:srgbClr val="1A1A1A"/>
+                </a:solidFill>
+                <a:latin typeface="Calibri"/>
               </a:rPr>
               <a:t>app/lambda_handlers/appointment_reminder.py</a:t>
             </a:r>
           </a:p>
           <a:p>
-            <a:pPr lvl="1"/>
-            <a:r>
-              <a:rPr sz="1400">
-                <a:solidFill>
-                  <a:srgbClr val="222222"/>
-                </a:solidFill>
+            <a:pPr algn="l">
+              <a:spcAft>
+                <a:spcPts val="400"/>
+              </a:spcAft>
+            </a:pPr>
+            <a:r>
+              <a:rPr sz="1800" b="1">
+                <a:solidFill>
+                  <a:srgbClr val="109BC4"/>
+                </a:solidFill>
+                <a:latin typeface="Calibri"/>
+              </a:rPr>
+              <a:t>▸  </a:t>
+            </a:r>
+            <a:r>
+              <a:rPr sz="1700">
+                <a:solidFill>
+                  <a:srgbClr val="1A1A1A"/>
+                </a:solidFill>
+                <a:latin typeface="Calibri"/>
               </a:rPr>
               <a:t>EventBridge cron → Lambda (Python 3.11, 256 MB, 30 s timeout)</a:t>
             </a:r>
           </a:p>
           <a:p>
-            <a:pPr lvl="1"/>
-            <a:r>
-              <a:rPr sz="1400">
-                <a:solidFill>
-                  <a:srgbClr val="222222"/>
-                </a:solidFill>
+            <a:pPr algn="l">
+              <a:spcAft>
+                <a:spcPts val="400"/>
+              </a:spcAft>
+            </a:pPr>
+            <a:r>
+              <a:rPr sz="1800" b="1">
+                <a:solidFill>
+                  <a:srgbClr val="109BC4"/>
+                </a:solidFill>
+                <a:latin typeface="Calibri"/>
+              </a:rPr>
+              <a:t>▸  </a:t>
+            </a:r>
+            <a:r>
+              <a:rPr sz="1700">
+                <a:solidFill>
+                  <a:srgbClr val="1A1A1A"/>
+                </a:solidFill>
+                <a:latin typeface="Calibri"/>
               </a:rPr>
               <a:t>Reads RDS for appointments due in next 24 h</a:t>
             </a:r>
           </a:p>
           <a:p>
-            <a:pPr lvl="1"/>
-            <a:r>
-              <a:rPr sz="1400">
-                <a:solidFill>
-                  <a:srgbClr val="222222"/>
-                </a:solidFill>
+            <a:pPr algn="l">
+              <a:spcAft>
+                <a:spcPts val="400"/>
+              </a:spcAft>
+            </a:pPr>
+            <a:r>
+              <a:rPr sz="1800" b="1">
+                <a:solidFill>
+                  <a:srgbClr val="109BC4"/>
+                </a:solidFill>
+                <a:latin typeface="Calibri"/>
+              </a:rPr>
+              <a:t>▸  </a:t>
+            </a:r>
+            <a:r>
+              <a:rPr sz="1700">
+                <a:solidFill>
+                  <a:srgbClr val="1A1A1A"/>
+                </a:solidFill>
+                <a:latin typeface="Calibri"/>
               </a:rPr>
               <a:t>Publishes one message per appointment to SNS topic</a:t>
             </a:r>
           </a:p>
           <a:p>
-            <a:pPr lvl="1"/>
-            <a:r>
-              <a:rPr sz="1400">
-                <a:solidFill>
-                  <a:srgbClr val="222222"/>
-                </a:solidFill>
+            <a:pPr algn="l">
+              <a:spcAft>
+                <a:spcPts val="400"/>
+              </a:spcAft>
+            </a:pPr>
+            <a:r>
+              <a:rPr sz="1800" b="1">
+                <a:solidFill>
+                  <a:srgbClr val="109BC4"/>
+                </a:solidFill>
+                <a:latin typeface="Calibri"/>
+              </a:rPr>
+              <a:t>▸  </a:t>
+            </a:r>
+            <a:r>
+              <a:rPr sz="1700">
+                <a:solidFill>
+                  <a:srgbClr val="1A1A1A"/>
+                </a:solidFill>
+                <a:latin typeface="Calibri"/>
               </a:rPr>
               <a:t>SNS → Email subscription (configurable via alarm_email Terraform var)</a:t>
+            </a:r>
+          </a:p>
+        </p:txBody>
+      </p:sp>
+      <p:sp>
+        <p:nvSpPr>
+          <p:cNvPr id="6" name="TextBox 5"/>
+          <p:cNvSpPr txBox="1"/>
+          <p:nvPr/>
+        </p:nvSpPr>
+        <p:spPr>
+          <a:xfrm>
+            <a:off x="502920" y="6446520"/>
+            <a:ext cx="7315200" cy="274320"/>
+          </a:xfrm>
+          <a:prstGeom prst="rect">
+            <a:avLst/>
+          </a:prstGeom>
+          <a:noFill/>
+        </p:spPr>
+        <p:txBody>
+          <a:bodyPr wrap="square" lIns="0" rIns="0" tIns="0" bIns="0" anchor="t">
+            <a:spAutoFit/>
+          </a:bodyPr>
+          <a:lstStyle/>
+          <a:p>
+            <a:pPr algn="l"/>
+            <a:r>
+              <a:rPr sz="900" b="0">
+                <a:solidFill>
+                  <a:srgbClr val="555F6D"/>
+                </a:solidFill>
+                <a:latin typeface="Calibri"/>
+              </a:rPr>
+              <a:t>Cloud-Native Healthcare DMS  ·  BITS Pilani  ·  Group 23</a:t>
+            </a:r>
+          </a:p>
+        </p:txBody>
+      </p:sp>
+      <p:sp>
+        <p:nvSpPr>
+          <p:cNvPr id="7" name="TextBox 6"/>
+          <p:cNvSpPr txBox="1"/>
+          <p:nvPr/>
+        </p:nvSpPr>
+        <p:spPr>
+          <a:xfrm>
+            <a:off x="10515600" y="6446520"/>
+            <a:ext cx="1188720" cy="274320"/>
+          </a:xfrm>
+          <a:prstGeom prst="rect">
+            <a:avLst/>
+          </a:prstGeom>
+          <a:noFill/>
+        </p:spPr>
+        <p:txBody>
+          <a:bodyPr wrap="square" lIns="0" rIns="0" tIns="0" bIns="0" anchor="t">
+            <a:spAutoFit/>
+          </a:bodyPr>
+          <a:lstStyle/>
+          <a:p>
+            <a:pPr algn="r"/>
+            <a:r>
+              <a:rPr sz="900" b="0">
+                <a:solidFill>
+                  <a:srgbClr val="555F6D"/>
+                </a:solidFill>
+                <a:latin typeface="Calibri"/>
+              </a:rPr>
+              <a:t>8 / 14</a:t>
             </a:r>
           </a:p>
         </p:txBody>
@@ -5808,24 +8948,77 @@
       <p:grpSpPr/>
       <p:sp>
         <p:nvSpPr>
-          <p:cNvPr id="2" name="Title 1"/>
-          <p:cNvSpPr>
-            <a:spLocks noGrp="1"/>
-          </p:cNvSpPr>
-          <p:nvPr>
-            <p:ph type="title"/>
-          </p:nvPr>
-        </p:nvSpPr>
-        <p:spPr/>
-        <p:txBody>
-          <a:bodyPr/>
-          <a:lstStyle/>
-          <a:p>
-            <a:r>
-              <a:rPr b="1">
-                <a:solidFill>
-                  <a:srgbClr val="0B3D91"/>
-                </a:solidFill>
+          <p:cNvPr id="2" name="Rectangle 1"/>
+          <p:cNvSpPr/>
+          <p:nvPr/>
+        </p:nvSpPr>
+        <p:spPr>
+          <a:xfrm>
+            <a:off x="502920" y="365760"/>
+            <a:ext cx="164592" cy="777240"/>
+          </a:xfrm>
+          <a:prstGeom prst="rect">
+            <a:avLst/>
+          </a:prstGeom>
+          <a:solidFill>
+            <a:srgbClr val="109BC4"/>
+          </a:solidFill>
+          <a:ln>
+            <a:noFill/>
+          </a:ln>
+          <a:effectLst/>
+        </p:spPr>
+        <p:style>
+          <a:lnRef idx="1">
+            <a:schemeClr val="accent1"/>
+          </a:lnRef>
+          <a:fillRef idx="3">
+            <a:schemeClr val="accent1"/>
+          </a:fillRef>
+          <a:effectRef idx="2">
+            <a:schemeClr val="accent1"/>
+          </a:effectRef>
+          <a:fontRef idx="minor">
+            <a:schemeClr val="lt1"/>
+          </a:fontRef>
+        </p:style>
+        <p:txBody>
+          <a:bodyPr rtlCol="0" anchor="ctr"/>
+          <a:lstStyle/>
+          <a:p>
+            <a:pPr algn="ctr"/>
+          </a:p>
+        </p:txBody>
+      </p:sp>
+      <p:sp>
+        <p:nvSpPr>
+          <p:cNvPr id="3" name="TextBox 2"/>
+          <p:cNvSpPr txBox="1"/>
+          <p:nvPr/>
+        </p:nvSpPr>
+        <p:spPr>
+          <a:xfrm>
+            <a:off x="868680" y="365760"/>
+            <a:ext cx="10820095" cy="777240"/>
+          </a:xfrm>
+          <a:prstGeom prst="rect">
+            <a:avLst/>
+          </a:prstGeom>
+          <a:noFill/>
+        </p:spPr>
+        <p:txBody>
+          <a:bodyPr wrap="square" anchor="ctr">
+            <a:spAutoFit/>
+          </a:bodyPr>
+          <a:lstStyle/>
+          <a:p>
+            <a:pPr algn="l"/>
+            <a:r>
+              <a:rPr sz="2800" b="1">
+                <a:solidFill>
+                  <a:srgbClr val="0B2E6F"/>
+                </a:solidFill>
+                <a:latin typeface="Calibri"/>
               </a:rPr>
               <a:t>Cost Optimisation (O5)</a:t>
             </a:r>
@@ -5834,93 +9027,638 @@
       </p:sp>
       <p:sp>
         <p:nvSpPr>
-          <p:cNvPr id="3" name="Content Placeholder 2"/>
-          <p:cNvSpPr>
-            <a:spLocks noGrp="1"/>
-          </p:cNvSpPr>
-          <p:nvPr>
-            <p:ph idx="1"/>
-          </p:nvPr>
-        </p:nvSpPr>
-        <p:spPr/>
-        <p:txBody>
-          <a:bodyPr wrap="square"/>
-          <a:lstStyle/>
-          <a:p>
-            <a:pPr/>
-            <a:r>
-              <a:rPr sz="1600">
-                <a:solidFill>
-                  <a:srgbClr val="222222"/>
-                </a:solidFill>
-              </a:rPr>
-              <a:t>Resource — Sizing — ~ Monthly USD</a:t>
-            </a:r>
-          </a:p>
-          <a:p>
-            <a:pPr/>
-            <a:r>
-              <a:rPr sz="1600">
-                <a:solidFill>
-                  <a:srgbClr val="222222"/>
-                </a:solidFill>
-              </a:rPr>
-              <a:t>EC2 t3.micro × 2 — ASG min=1, desired=2 — $15</a:t>
-            </a:r>
-          </a:p>
-          <a:p>
-            <a:pPr/>
-            <a:r>
-              <a:rPr sz="1600">
-                <a:solidFill>
-                  <a:srgbClr val="222222"/>
-                </a:solidFill>
-              </a:rPr>
-              <a:t>ALB — Internet-facing — $18</a:t>
-            </a:r>
-          </a:p>
-          <a:p>
-            <a:pPr/>
-            <a:r>
-              <a:rPr sz="1600">
-                <a:solidFill>
-                  <a:srgbClr val="222222"/>
-                </a:solidFill>
-              </a:rPr>
-              <a:t>RDS db.t3.micro Multi-AZ — 20 GB gp3 — $30</a:t>
-            </a:r>
-          </a:p>
-          <a:p>
-            <a:pPr/>
-            <a:r>
-              <a:rPr sz="1600">
-                <a:solidFill>
-                  <a:srgbClr val="222222"/>
-                </a:solidFill>
-              </a:rPr>
-              <a:t>S3 + Lambda + CloudWatch + CloudTrail — &lt; $3</a:t>
-            </a:r>
-          </a:p>
-          <a:p>
-            <a:pPr/>
-            <a:r>
-              <a:rPr sz="1600">
-                <a:solidFill>
-                  <a:srgbClr val="222222"/>
-                </a:solidFill>
-              </a:rPr>
-              <a:t>NAT Gateway — Single, cost-conscious — $32</a:t>
-            </a:r>
-          </a:p>
-          <a:p>
-            <a:pPr/>
-            <a:r>
-              <a:rPr sz="1600">
-                <a:solidFill>
-                  <a:srgbClr val="222222"/>
-                </a:solidFill>
-              </a:rPr>
-              <a:t>Total — ~$98 / mo</a:t>
+          <p:cNvPr id="4" name="Rectangle 3"/>
+          <p:cNvSpPr/>
+          <p:nvPr/>
+        </p:nvSpPr>
+        <p:spPr>
+          <a:xfrm>
+            <a:off x="868680" y="1188720"/>
+            <a:ext cx="1097280" cy="38100"/>
+          </a:xfrm>
+          <a:prstGeom prst="rect">
+            <a:avLst/>
+          </a:prstGeom>
+          <a:solidFill>
+            <a:srgbClr val="109BC4"/>
+          </a:solidFill>
+          <a:ln>
+            <a:noFill/>
+          </a:ln>
+          <a:effectLst/>
+        </p:spPr>
+        <p:style>
+          <a:lnRef idx="1">
+            <a:schemeClr val="accent1"/>
+          </a:lnRef>
+          <a:fillRef idx="3">
+            <a:schemeClr val="accent1"/>
+          </a:fillRef>
+          <a:effectRef idx="2">
+            <a:schemeClr val="accent1"/>
+          </a:effectRef>
+          <a:fontRef idx="minor">
+            <a:schemeClr val="lt1"/>
+          </a:fontRef>
+        </p:style>
+        <p:txBody>
+          <a:bodyPr rtlCol="0" anchor="ctr"/>
+          <a:lstStyle/>
+          <a:p>
+            <a:pPr algn="ctr"/>
+          </a:p>
+        </p:txBody>
+      </p:sp>
+      <p:graphicFrame>
+        <p:nvGraphicFramePr>
+          <p:cNvPr id="5" name="Table 4"/>
+          <p:cNvGraphicFramePr>
+            <a:graphicFrameLocks noGrp="1"/>
+          </p:cNvGraphicFramePr>
+          <p:nvPr/>
+        </p:nvGraphicFramePr>
+        <p:xfrm>
+          <a:off x="502920" y="1417320"/>
+          <a:ext cx="11185854" cy="2560320"/>
+        </p:xfrm>
+        <a:graphic>
+          <a:graphicData uri="http://schemas.openxmlformats.org/drawingml/2006/table">
+            <a:tbl>
+              <a:tblPr firstRow="1" bandRow="1">
+                <a:tableStyleId>{5C22544A-7EE6-4342-B048-85BDC9FD1C3A}</a:tableStyleId>
+              </a:tblPr>
+              <a:tblGrid>
+                <a:gridCol w="3355756"/>
+                <a:gridCol w="3915049"/>
+                <a:gridCol w="3915049"/>
+              </a:tblGrid>
+              <a:tr h="365760">
+                <a:tc>
+                  <a:txBody>
+                    <a:bodyPr wrap="square"/>
+                    <a:lstStyle/>
+                    <a:p>
+                      <a:pPr algn="l"/>
+                      <a:r>
+                        <a:rPr sz="1200" b="1">
+                          <a:solidFill>
+                            <a:srgbClr val="FFFFFF"/>
+                          </a:solidFill>
+                          <a:latin typeface="Calibri"/>
+                        </a:rPr>
+                        <a:t>Resource</a:t>
+                      </a:r>
+                    </a:p>
+                  </a:txBody>
+                  <a:tcPr marL="73152" marR="73152" marT="36576" marB="36576">
+                    <a:solidFill>
+                      <a:srgbClr val="0B2E6F"/>
+                    </a:solidFill>
+                  </a:tcPr>
+                </a:tc>
+                <a:tc>
+                  <a:txBody>
+                    <a:bodyPr wrap="square"/>
+                    <a:lstStyle/>
+                    <a:p>
+                      <a:pPr algn="l"/>
+                      <a:r>
+                        <a:rPr sz="1200" b="1">
+                          <a:solidFill>
+                            <a:srgbClr val="FFFFFF"/>
+                          </a:solidFill>
+                          <a:latin typeface="Calibri"/>
+                        </a:rPr>
+                        <a:t>Sizing</a:t>
+                      </a:r>
+                    </a:p>
+                  </a:txBody>
+                  <a:tcPr marL="73152" marR="73152" marT="36576" marB="36576">
+                    <a:solidFill>
+                      <a:srgbClr val="0B2E6F"/>
+                    </a:solidFill>
+                  </a:tcPr>
+                </a:tc>
+                <a:tc>
+                  <a:txBody>
+                    <a:bodyPr wrap="square"/>
+                    <a:lstStyle/>
+                    <a:p>
+                      <a:pPr algn="l"/>
+                      <a:r>
+                        <a:rPr sz="1200" b="1">
+                          <a:solidFill>
+                            <a:srgbClr val="FFFFFF"/>
+                          </a:solidFill>
+                          <a:latin typeface="Calibri"/>
+                        </a:rPr>
+                        <a:t>~ Monthly USD</a:t>
+                      </a:r>
+                    </a:p>
+                  </a:txBody>
+                  <a:tcPr marL="73152" marR="73152" marT="36576" marB="36576">
+                    <a:solidFill>
+                      <a:srgbClr val="0B2E6F"/>
+                    </a:solidFill>
+                  </a:tcPr>
+                </a:tc>
+              </a:tr>
+              <a:tr h="365760">
+                <a:tc>
+                  <a:txBody>
+                    <a:bodyPr wrap="square"/>
+                    <a:lstStyle/>
+                    <a:p>
+                      <a:pPr algn="l"/>
+                      <a:r>
+                        <a:rPr sz="1200">
+                          <a:solidFill>
+                            <a:srgbClr val="1A1A1A"/>
+                          </a:solidFill>
+                          <a:latin typeface="Calibri"/>
+                        </a:rPr>
+                        <a:t>EC2 t3.micro × 2</a:t>
+                      </a:r>
+                    </a:p>
+                  </a:txBody>
+                  <a:tcPr marL="73152" marR="73152" marT="36576" marB="36576">
+                    <a:solidFill>
+                      <a:srgbClr val="FFFFFF"/>
+                    </a:solidFill>
+                  </a:tcPr>
+                </a:tc>
+                <a:tc>
+                  <a:txBody>
+                    <a:bodyPr wrap="square"/>
+                    <a:lstStyle/>
+                    <a:p>
+                      <a:pPr algn="l"/>
+                      <a:r>
+                        <a:rPr sz="1200">
+                          <a:solidFill>
+                            <a:srgbClr val="1A1A1A"/>
+                          </a:solidFill>
+                          <a:latin typeface="Calibri"/>
+                        </a:rPr>
+                        <a:t>ASG min=1, desired=2</a:t>
+                      </a:r>
+                    </a:p>
+                  </a:txBody>
+                  <a:tcPr marL="73152" marR="73152" marT="36576" marB="36576">
+                    <a:solidFill>
+                      <a:srgbClr val="FFFFFF"/>
+                    </a:solidFill>
+                  </a:tcPr>
+                </a:tc>
+                <a:tc>
+                  <a:txBody>
+                    <a:bodyPr wrap="square"/>
+                    <a:lstStyle/>
+                    <a:p>
+                      <a:pPr algn="l"/>
+                      <a:r>
+                        <a:rPr sz="1200">
+                          <a:solidFill>
+                            <a:srgbClr val="1A1A1A"/>
+                          </a:solidFill>
+                          <a:latin typeface="Calibri"/>
+                        </a:rPr>
+                        <a:t>$15</a:t>
+                      </a:r>
+                    </a:p>
+                  </a:txBody>
+                  <a:tcPr marL="73152" marR="73152" marT="36576" marB="36576">
+                    <a:solidFill>
+                      <a:srgbClr val="FFFFFF"/>
+                    </a:solidFill>
+                  </a:tcPr>
+                </a:tc>
+              </a:tr>
+              <a:tr h="365760">
+                <a:tc>
+                  <a:txBody>
+                    <a:bodyPr wrap="square"/>
+                    <a:lstStyle/>
+                    <a:p>
+                      <a:pPr algn="l"/>
+                      <a:r>
+                        <a:rPr sz="1200">
+                          <a:solidFill>
+                            <a:srgbClr val="1A1A1A"/>
+                          </a:solidFill>
+                          <a:latin typeface="Calibri"/>
+                        </a:rPr>
+                        <a:t>ALB</a:t>
+                      </a:r>
+                    </a:p>
+                  </a:txBody>
+                  <a:tcPr marL="73152" marR="73152" marT="36576" marB="36576">
+                    <a:solidFill>
+                      <a:srgbClr val="EEF2F9"/>
+                    </a:solidFill>
+                  </a:tcPr>
+                </a:tc>
+                <a:tc>
+                  <a:txBody>
+                    <a:bodyPr wrap="square"/>
+                    <a:lstStyle/>
+                    <a:p>
+                      <a:pPr algn="l"/>
+                      <a:r>
+                        <a:rPr sz="1200">
+                          <a:solidFill>
+                            <a:srgbClr val="1A1A1A"/>
+                          </a:solidFill>
+                          <a:latin typeface="Calibri"/>
+                        </a:rPr>
+                        <a:t>Internet-facing</a:t>
+                      </a:r>
+                    </a:p>
+                  </a:txBody>
+                  <a:tcPr marL="73152" marR="73152" marT="36576" marB="36576">
+                    <a:solidFill>
+                      <a:srgbClr val="EEF2F9"/>
+                    </a:solidFill>
+                  </a:tcPr>
+                </a:tc>
+                <a:tc>
+                  <a:txBody>
+                    <a:bodyPr wrap="square"/>
+                    <a:lstStyle/>
+                    <a:p>
+                      <a:pPr algn="l"/>
+                      <a:r>
+                        <a:rPr sz="1200">
+                          <a:solidFill>
+                            <a:srgbClr val="1A1A1A"/>
+                          </a:solidFill>
+                          <a:latin typeface="Calibri"/>
+                        </a:rPr>
+                        <a:t>$18</a:t>
+                      </a:r>
+                    </a:p>
+                  </a:txBody>
+                  <a:tcPr marL="73152" marR="73152" marT="36576" marB="36576">
+                    <a:solidFill>
+                      <a:srgbClr val="EEF2F9"/>
+                    </a:solidFill>
+                  </a:tcPr>
+                </a:tc>
+              </a:tr>
+              <a:tr h="365760">
+                <a:tc>
+                  <a:txBody>
+                    <a:bodyPr wrap="square"/>
+                    <a:lstStyle/>
+                    <a:p>
+                      <a:pPr algn="l"/>
+                      <a:r>
+                        <a:rPr sz="1200">
+                          <a:solidFill>
+                            <a:srgbClr val="1A1A1A"/>
+                          </a:solidFill>
+                          <a:latin typeface="Calibri"/>
+                        </a:rPr>
+                        <a:t>RDS db.t3.micro Multi-AZ</a:t>
+                      </a:r>
+                    </a:p>
+                  </a:txBody>
+                  <a:tcPr marL="73152" marR="73152" marT="36576" marB="36576">
+                    <a:solidFill>
+                      <a:srgbClr val="FFFFFF"/>
+                    </a:solidFill>
+                  </a:tcPr>
+                </a:tc>
+                <a:tc>
+                  <a:txBody>
+                    <a:bodyPr wrap="square"/>
+                    <a:lstStyle/>
+                    <a:p>
+                      <a:pPr algn="l"/>
+                      <a:r>
+                        <a:rPr sz="1200">
+                          <a:solidFill>
+                            <a:srgbClr val="1A1A1A"/>
+                          </a:solidFill>
+                          <a:latin typeface="Calibri"/>
+                        </a:rPr>
+                        <a:t>20 GB gp3</a:t>
+                      </a:r>
+                    </a:p>
+                  </a:txBody>
+                  <a:tcPr marL="73152" marR="73152" marT="36576" marB="36576">
+                    <a:solidFill>
+                      <a:srgbClr val="FFFFFF"/>
+                    </a:solidFill>
+                  </a:tcPr>
+                </a:tc>
+                <a:tc>
+                  <a:txBody>
+                    <a:bodyPr wrap="square"/>
+                    <a:lstStyle/>
+                    <a:p>
+                      <a:pPr algn="l"/>
+                      <a:r>
+                        <a:rPr sz="1200">
+                          <a:solidFill>
+                            <a:srgbClr val="1A1A1A"/>
+                          </a:solidFill>
+                          <a:latin typeface="Calibri"/>
+                        </a:rPr>
+                        <a:t>$30</a:t>
+                      </a:r>
+                    </a:p>
+                  </a:txBody>
+                  <a:tcPr marL="73152" marR="73152" marT="36576" marB="36576">
+                    <a:solidFill>
+                      <a:srgbClr val="FFFFFF"/>
+                    </a:solidFill>
+                  </a:tcPr>
+                </a:tc>
+              </a:tr>
+              <a:tr h="365760">
+                <a:tc>
+                  <a:txBody>
+                    <a:bodyPr wrap="square"/>
+                    <a:lstStyle/>
+                    <a:p>
+                      <a:pPr algn="l"/>
+                      <a:r>
+                        <a:rPr sz="1200">
+                          <a:solidFill>
+                            <a:srgbClr val="1A1A1A"/>
+                          </a:solidFill>
+                          <a:latin typeface="Calibri"/>
+                        </a:rPr>
+                        <a:t>S3 + Lambda + CloudWatch + CloudTrail</a:t>
+                      </a:r>
+                    </a:p>
+                  </a:txBody>
+                  <a:tcPr marL="73152" marR="73152" marT="36576" marB="36576">
+                    <a:solidFill>
+                      <a:srgbClr val="EEF2F9"/>
+                    </a:solidFill>
+                  </a:tcPr>
+                </a:tc>
+                <a:tc>
+                  <a:txBody>
+                    <a:bodyPr wrap="square"/>
+                    <a:lstStyle/>
+                    <a:p>
+                      <a:pPr algn="l"/>
+                      <a:r>
+                        <a:rPr sz="1200">
+                          <a:solidFill>
+                            <a:srgbClr val="1A1A1A"/>
+                          </a:solidFill>
+                          <a:latin typeface="Calibri"/>
+                        </a:rPr>
+                        <a:t/>
+                      </a:r>
+                    </a:p>
+                  </a:txBody>
+                  <a:tcPr marL="73152" marR="73152" marT="36576" marB="36576">
+                    <a:solidFill>
+                      <a:srgbClr val="EEF2F9"/>
+                    </a:solidFill>
+                  </a:tcPr>
+                </a:tc>
+                <a:tc>
+                  <a:txBody>
+                    <a:bodyPr wrap="square"/>
+                    <a:lstStyle/>
+                    <a:p>
+                      <a:pPr algn="l"/>
+                      <a:r>
+                        <a:rPr sz="1200">
+                          <a:solidFill>
+                            <a:srgbClr val="1A1A1A"/>
+                          </a:solidFill>
+                          <a:latin typeface="Calibri"/>
+                        </a:rPr>
+                        <a:t>&lt; $3</a:t>
+                      </a:r>
+                    </a:p>
+                  </a:txBody>
+                  <a:tcPr marL="73152" marR="73152" marT="36576" marB="36576">
+                    <a:solidFill>
+                      <a:srgbClr val="EEF2F9"/>
+                    </a:solidFill>
+                  </a:tcPr>
+                </a:tc>
+              </a:tr>
+              <a:tr h="365760">
+                <a:tc>
+                  <a:txBody>
+                    <a:bodyPr wrap="square"/>
+                    <a:lstStyle/>
+                    <a:p>
+                      <a:pPr algn="l"/>
+                      <a:r>
+                        <a:rPr sz="1200">
+                          <a:solidFill>
+                            <a:srgbClr val="1A1A1A"/>
+                          </a:solidFill>
+                          <a:latin typeface="Calibri"/>
+                        </a:rPr>
+                        <a:t>NAT Gateway</a:t>
+                      </a:r>
+                    </a:p>
+                  </a:txBody>
+                  <a:tcPr marL="73152" marR="73152" marT="36576" marB="36576">
+                    <a:solidFill>
+                      <a:srgbClr val="FFFFFF"/>
+                    </a:solidFill>
+                  </a:tcPr>
+                </a:tc>
+                <a:tc>
+                  <a:txBody>
+                    <a:bodyPr wrap="square"/>
+                    <a:lstStyle/>
+                    <a:p>
+                      <a:pPr algn="l"/>
+                      <a:r>
+                        <a:rPr sz="1200">
+                          <a:solidFill>
+                            <a:srgbClr val="1A1A1A"/>
+                          </a:solidFill>
+                          <a:latin typeface="Calibri"/>
+                        </a:rPr>
+                        <a:t>Single, cost-conscious</a:t>
+                      </a:r>
+                    </a:p>
+                  </a:txBody>
+                  <a:tcPr marL="73152" marR="73152" marT="36576" marB="36576">
+                    <a:solidFill>
+                      <a:srgbClr val="FFFFFF"/>
+                    </a:solidFill>
+                  </a:tcPr>
+                </a:tc>
+                <a:tc>
+                  <a:txBody>
+                    <a:bodyPr wrap="square"/>
+                    <a:lstStyle/>
+                    <a:p>
+                      <a:pPr algn="l"/>
+                      <a:r>
+                        <a:rPr sz="1200">
+                          <a:solidFill>
+                            <a:srgbClr val="1A1A1A"/>
+                          </a:solidFill>
+                          <a:latin typeface="Calibri"/>
+                        </a:rPr>
+                        <a:t>$32</a:t>
+                      </a:r>
+                    </a:p>
+                  </a:txBody>
+                  <a:tcPr marL="73152" marR="73152" marT="36576" marB="36576">
+                    <a:solidFill>
+                      <a:srgbClr val="FFFFFF"/>
+                    </a:solidFill>
+                  </a:tcPr>
+                </a:tc>
+              </a:tr>
+              <a:tr h="365760">
+                <a:tc>
+                  <a:txBody>
+                    <a:bodyPr wrap="square"/>
+                    <a:lstStyle/>
+                    <a:p>
+                      <a:pPr algn="l"/>
+                      <a:r>
+                        <a:rPr sz="1200">
+                          <a:solidFill>
+                            <a:srgbClr val="1A1A1A"/>
+                          </a:solidFill>
+                          <a:latin typeface="Calibri"/>
+                        </a:rPr>
+                        <a:t>Total</a:t>
+                      </a:r>
+                    </a:p>
+                  </a:txBody>
+                  <a:tcPr marL="73152" marR="73152" marT="36576" marB="36576">
+                    <a:solidFill>
+                      <a:srgbClr val="EEF2F9"/>
+                    </a:solidFill>
+                  </a:tcPr>
+                </a:tc>
+                <a:tc>
+                  <a:txBody>
+                    <a:bodyPr wrap="square"/>
+                    <a:lstStyle/>
+                    <a:p>
+                      <a:pPr algn="l"/>
+                      <a:r>
+                        <a:rPr sz="1200">
+                          <a:solidFill>
+                            <a:srgbClr val="1A1A1A"/>
+                          </a:solidFill>
+                          <a:latin typeface="Calibri"/>
+                        </a:rPr>
+                        <a:t/>
+                      </a:r>
+                    </a:p>
+                  </a:txBody>
+                  <a:tcPr marL="73152" marR="73152" marT="36576" marB="36576">
+                    <a:solidFill>
+                      <a:srgbClr val="EEF2F9"/>
+                    </a:solidFill>
+                  </a:tcPr>
+                </a:tc>
+                <a:tc>
+                  <a:txBody>
+                    <a:bodyPr wrap="square"/>
+                    <a:lstStyle/>
+                    <a:p>
+                      <a:pPr algn="l"/>
+                      <a:r>
+                        <a:rPr sz="1200">
+                          <a:solidFill>
+                            <a:srgbClr val="1A1A1A"/>
+                          </a:solidFill>
+                          <a:latin typeface="Calibri"/>
+                        </a:rPr>
+                        <a:t>~$98 / mo</a:t>
+                      </a:r>
+                    </a:p>
+                  </a:txBody>
+                  <a:tcPr marL="73152" marR="73152" marT="36576" marB="36576">
+                    <a:solidFill>
+                      <a:srgbClr val="EEF2F9"/>
+                    </a:solidFill>
+                  </a:tcPr>
+                </a:tc>
+              </a:tr>
+            </a:tbl>
+          </a:graphicData>
+        </a:graphic>
+      </p:graphicFrame>
+      <p:sp>
+        <p:nvSpPr>
+          <p:cNvPr id="6" name="TextBox 5"/>
+          <p:cNvSpPr txBox="1"/>
+          <p:nvPr/>
+        </p:nvSpPr>
+        <p:spPr>
+          <a:xfrm>
+            <a:off x="502920" y="6446520"/>
+            <a:ext cx="7315200" cy="274320"/>
+          </a:xfrm>
+          <a:prstGeom prst="rect">
+            <a:avLst/>
+          </a:prstGeom>
+          <a:noFill/>
+        </p:spPr>
+        <p:txBody>
+          <a:bodyPr wrap="square" lIns="0" rIns="0" tIns="0" bIns="0" anchor="t">
+            <a:spAutoFit/>
+          </a:bodyPr>
+          <a:lstStyle/>
+          <a:p>
+            <a:pPr algn="l"/>
+            <a:r>
+              <a:rPr sz="900" b="0">
+                <a:solidFill>
+                  <a:srgbClr val="555F6D"/>
+                </a:solidFill>
+                <a:latin typeface="Calibri"/>
+              </a:rPr>
+              <a:t>Cloud-Native Healthcare DMS  ·  BITS Pilani  ·  Group 23</a:t>
+            </a:r>
+          </a:p>
+        </p:txBody>
+      </p:sp>
+      <p:sp>
+        <p:nvSpPr>
+          <p:cNvPr id="7" name="TextBox 6"/>
+          <p:cNvSpPr txBox="1"/>
+          <p:nvPr/>
+        </p:nvSpPr>
+        <p:spPr>
+          <a:xfrm>
+            <a:off x="10515600" y="6446520"/>
+            <a:ext cx="1188720" cy="274320"/>
+          </a:xfrm>
+          <a:prstGeom prst="rect">
+            <a:avLst/>
+          </a:prstGeom>
+          <a:noFill/>
+        </p:spPr>
+        <p:txBody>
+          <a:bodyPr wrap="square" lIns="0" rIns="0" tIns="0" bIns="0" anchor="t">
+            <a:spAutoFit/>
+          </a:bodyPr>
+          <a:lstStyle/>
+          <a:p>
+            <a:pPr algn="r"/>
+            <a:r>
+              <a:rPr sz="900" b="0">
+                <a:solidFill>
+                  <a:srgbClr val="555F6D"/>
+                </a:solidFill>
+                <a:latin typeface="Calibri"/>
+              </a:rPr>
+              <a:t>9 / 14</a:t>
             </a:r>
           </a:p>
         </p:txBody>
